--- a/Livrables/Recit-Mission2/Impact_Adoption-IA_3-slides.pptx
+++ b/Livrables/Recit-Mission2/Impact_Adoption-IA_3-slides.pptx
@@ -3092,20 +3092,155 @@
       <p:grpSpPr/>
       <p:sp>
         <p:nvSpPr>
-          <p:cNvPr id="2" name="Rectangle 1"/>
+          <p:cNvPr id="2" name="TextBox 1"/>
+          <p:cNvSpPr txBox="1"/>
+          <p:nvPr/>
+        </p:nvSpPr>
+        <p:spPr>
+          <a:xfrm>
+            <a:off x="548640" y="292608"/>
+            <a:ext cx="10058400" cy="228600"/>
+          </a:xfrm>
+          <a:prstGeom prst="rect">
+            <a:avLst/>
+          </a:prstGeom>
+          <a:noFill/>
+        </p:spPr>
+        <p:txBody>
+          <a:bodyPr wrap="square">
+            <a:spAutoFit/>
+          </a:bodyPr>
+          <a:lstStyle/>
+          <a:p>
+            <a:pPr algn="l">
+              <a:lnSpc>
+                <a:spcPct val="115000"/>
+              </a:lnSpc>
+              <a:spcAft>
+                <a:spcPts val="400"/>
+              </a:spcAft>
+            </a:pPr>
+            <a:r>
+              <a:rPr sz="950" b="1">
+                <a:solidFill>
+                  <a:srgbClr val="000091"/>
+                </a:solidFill>
+                <a:latin typeface="Marianne"/>
+              </a:rPr>
+              <a:t>LE POINT DE DÉPART</a:t>
+            </a:r>
+          </a:p>
+        </p:txBody>
+      </p:sp>
+      <p:sp>
+        <p:nvSpPr>
+          <p:cNvPr id="3" name="TextBox 2"/>
+          <p:cNvSpPr txBox="1"/>
+          <p:nvPr/>
+        </p:nvSpPr>
+        <p:spPr>
+          <a:xfrm>
+            <a:off x="548640" y="530352"/>
+            <a:ext cx="11064240" cy="685800"/>
+          </a:xfrm>
+          <a:prstGeom prst="rect">
+            <a:avLst/>
+          </a:prstGeom>
+          <a:noFill/>
+        </p:spPr>
+        <p:txBody>
+          <a:bodyPr wrap="square">
+            <a:spAutoFit/>
+          </a:bodyPr>
+          <a:lstStyle/>
+          <a:p>
+            <a:pPr algn="l">
+              <a:lnSpc>
+                <a:spcPct val="115000"/>
+              </a:lnSpc>
+              <a:spcAft>
+                <a:spcPts val="400"/>
+              </a:spcAft>
+            </a:pPr>
+            <a:r>
+              <a:rPr sz="2600" b="1">
+                <a:solidFill>
+                  <a:srgbClr val="000091"/>
+                </a:solidFill>
+                <a:latin typeface="Marianne"/>
+              </a:rPr>
+              <a:t>L'IA existait. Mais elle</a:t>
+            </a:r>
+            <a:r>
+              <a:rPr sz="2600" b="0">
+                <a:solidFill>
+                  <a:srgbClr val="666666"/>
+                </a:solidFill>
+                <a:latin typeface="Marianne"/>
+              </a:rPr>
+              <a:t> restait dans les silos.</a:t>
+            </a:r>
+          </a:p>
+        </p:txBody>
+      </p:sp>
+      <p:sp>
+        <p:nvSpPr>
+          <p:cNvPr id="4" name="TextBox 3"/>
+          <p:cNvSpPr txBox="1"/>
+          <p:nvPr/>
+        </p:nvSpPr>
+        <p:spPr>
+          <a:xfrm>
+            <a:off x="10881360" y="292608"/>
+            <a:ext cx="822960" cy="228600"/>
+          </a:xfrm>
+          <a:prstGeom prst="rect">
+            <a:avLst/>
+          </a:prstGeom>
+          <a:noFill/>
+        </p:spPr>
+        <p:txBody>
+          <a:bodyPr wrap="square">
+            <a:spAutoFit/>
+          </a:bodyPr>
+          <a:lstStyle/>
+          <a:p>
+            <a:pPr algn="r">
+              <a:lnSpc>
+                <a:spcPct val="115000"/>
+              </a:lnSpc>
+              <a:spcAft>
+                <a:spcPts val="400"/>
+              </a:spcAft>
+            </a:pPr>
+            <a:r>
+              <a:rPr sz="950" b="1">
+                <a:solidFill>
+                  <a:srgbClr val="7F7FC8"/>
+                </a:solidFill>
+                <a:latin typeface="Marianne"/>
+              </a:rPr>
+              <a:t>1 / 3</a:t>
+            </a:r>
+          </a:p>
+        </p:txBody>
+      </p:sp>
+      <p:sp>
+        <p:nvSpPr>
+          <p:cNvPr id="5" name="Rectangle 4"/>
           <p:cNvSpPr/>
           <p:nvPr/>
         </p:nvSpPr>
         <p:spPr>
           <a:xfrm>
-            <a:off x="502920" y="502920"/>
-            <a:ext cx="11201400" cy="41148"/>
+            <a:off x="548640" y="1417320"/>
+            <a:ext cx="11109960" cy="868680"/>
           </a:xfrm>
           <a:prstGeom prst="rect">
             <a:avLst/>
           </a:prstGeom>
           <a:solidFill>
-            <a:srgbClr val="000091"/>
+            <a:srgbClr val="F5F5FE"/>
           </a:solidFill>
           <a:ln>
             <a:noFill/>
@@ -3136,140 +3271,20 @@
       </p:sp>
       <p:sp>
         <p:nvSpPr>
-          <p:cNvPr id="3" name="TextBox 2"/>
-          <p:cNvSpPr txBox="1"/>
-          <p:nvPr/>
-        </p:nvSpPr>
-        <p:spPr>
-          <a:xfrm>
-            <a:off x="502920" y="731520"/>
-            <a:ext cx="10058400" cy="365760"/>
-          </a:xfrm>
-          <a:prstGeom prst="rect">
-            <a:avLst/>
-          </a:prstGeom>
-          <a:noFill/>
-        </p:spPr>
-        <p:txBody>
-          <a:bodyPr wrap="square" lIns="0" rIns="0" tIns="0" bIns="0">
-            <a:spAutoFit/>
-          </a:bodyPr>
-          <a:lstStyle/>
-          <a:p>
-            <a:pPr algn="l">
-              <a:spcAft>
-                <a:spcPts val="600"/>
-              </a:spcAft>
-            </a:pPr>
-            <a:r>
-              <a:rPr sz="1300" b="1">
-                <a:solidFill>
-                  <a:srgbClr val="7F7FC8"/>
-                </a:solidFill>
-                <a:latin typeface="Marianne"/>
-              </a:rPr>
-              <a:t>LE POINT DE DÉPART</a:t>
-            </a:r>
-          </a:p>
-        </p:txBody>
-      </p:sp>
-      <p:sp>
-        <p:nvSpPr>
-          <p:cNvPr id="4" name="TextBox 3"/>
-          <p:cNvSpPr txBox="1"/>
-          <p:nvPr/>
-        </p:nvSpPr>
-        <p:spPr>
-          <a:xfrm>
-            <a:off x="10424160" y="658368"/>
-            <a:ext cx="1280160" cy="365760"/>
-          </a:xfrm>
-          <a:prstGeom prst="rect">
-            <a:avLst/>
-          </a:prstGeom>
-          <a:noFill/>
-        </p:spPr>
-        <p:txBody>
-          <a:bodyPr wrap="square" lIns="0" rIns="0" tIns="0" bIns="0">
-            <a:spAutoFit/>
-          </a:bodyPr>
-          <a:lstStyle/>
-          <a:p>
-            <a:pPr algn="r">
-              <a:spcAft>
-                <a:spcPts val="600"/>
-              </a:spcAft>
-            </a:pPr>
-            <a:r>
-              <a:rPr sz="1200" b="1">
-                <a:solidFill>
-                  <a:srgbClr val="7F7FC8"/>
-                </a:solidFill>
-                <a:latin typeface="Marianne"/>
-              </a:rPr>
-              <a:t>1 / 3</a:t>
-            </a:r>
-          </a:p>
-        </p:txBody>
-      </p:sp>
-      <p:sp>
-        <p:nvSpPr>
-          <p:cNvPr id="5" name="TextBox 4"/>
-          <p:cNvSpPr txBox="1"/>
-          <p:nvPr/>
-        </p:nvSpPr>
-        <p:spPr>
-          <a:xfrm>
-            <a:off x="502920" y="1097280"/>
-            <a:ext cx="11201400" cy="1143000"/>
-          </a:xfrm>
-          <a:prstGeom prst="rect">
-            <a:avLst/>
-          </a:prstGeom>
-          <a:noFill/>
-        </p:spPr>
-        <p:txBody>
-          <a:bodyPr wrap="square" lIns="0" rIns="0" tIns="0" bIns="0">
-            <a:spAutoFit/>
-          </a:bodyPr>
-          <a:lstStyle/>
-          <a:p>
-            <a:pPr algn="l">
-              <a:lnSpc>
-                <a:spcPct val="105000"/>
-              </a:lnSpc>
-              <a:spcAft>
-                <a:spcPts val="600"/>
-              </a:spcAft>
-            </a:pPr>
-            <a:r>
-              <a:rPr sz="3200" b="1">
-                <a:solidFill>
-                  <a:srgbClr val="000091"/>
-                </a:solidFill>
-                <a:latin typeface="Marianne"/>
-              </a:rPr>
-              <a:t>L'IA existait. Mais elle restait dans les silos.</a:t>
-            </a:r>
-          </a:p>
-        </p:txBody>
-      </p:sp>
-      <p:sp>
-        <p:nvSpPr>
           <p:cNvPr id="6" name="Rectangle 5"/>
           <p:cNvSpPr/>
           <p:nvPr/>
         </p:nvSpPr>
         <p:spPr>
           <a:xfrm>
-            <a:off x="502920" y="2468880"/>
-            <a:ext cx="11201400" cy="960120"/>
+            <a:off x="548640" y="1417320"/>
+            <a:ext cx="64008" cy="868680"/>
           </a:xfrm>
           <a:prstGeom prst="rect">
             <a:avLst/>
           </a:prstGeom>
           <a:solidFill>
-            <a:srgbClr val="F5F5FE"/>
+            <a:srgbClr val="000091"/>
           </a:solidFill>
           <a:ln>
             <a:noFill/>
@@ -3291,45 +3306,94 @@
           </a:fontRef>
         </p:style>
         <p:txBody>
-          <a:bodyPr rtlCol="0" anchor="ctr" wrap="square" lIns="228600" rIns="182880" tIns="109728" bIns="91440"/>
-          <a:lstStyle/>
-          <a:p>
-            <a:pPr algn="ctr">
+          <a:bodyPr rtlCol="0" anchor="ctr"/>
+          <a:lstStyle/>
+          <a:p>
+            <a:pPr algn="ctr"/>
+          </a:p>
+        </p:txBody>
+      </p:sp>
+      <p:sp>
+        <p:nvSpPr>
+          <p:cNvPr id="7" name="TextBox 6"/>
+          <p:cNvSpPr txBox="1"/>
+          <p:nvPr/>
+        </p:nvSpPr>
+        <p:spPr>
+          <a:xfrm>
+            <a:off x="749808" y="1508760"/>
+            <a:ext cx="10707624" cy="704087"/>
+          </a:xfrm>
+          <a:prstGeom prst="rect">
+            <a:avLst/>
+          </a:prstGeom>
+          <a:noFill/>
+        </p:spPr>
+        <p:txBody>
+          <a:bodyPr wrap="square">
+            <a:spAutoFit/>
+          </a:bodyPr>
+          <a:lstStyle/>
+          <a:p>
+            <a:pPr algn="l">
               <a:lnSpc>
                 <a:spcPct val="115000"/>
               </a:lnSpc>
+              <a:spcAft>
+                <a:spcPts val="400"/>
+              </a:spcAft>
             </a:pPr>
             <a:r>
-              <a:rPr sz="1600">
-                <a:solidFill>
-                  <a:srgbClr val="2B2B2B"/>
-                </a:solidFill>
-                <a:latin typeface="Marianne"/>
-              </a:rPr>
-              <a:t>Le frein n'est jamais le modèle, c'est l'usage et l'outillage. Sur poste managé, un agent ne peut même pas installer un harness. L'adoption restait individuelle — sans pratique d'équipe.</a:t>
-            </a:r>
-          </a:p>
-        </p:txBody>
-      </p:sp>
-      <p:sp>
-        <p:nvSpPr>
-          <p:cNvPr id="7" name="Rectangle 6"/>
+              <a:rPr sz="1200" b="0">
+                <a:solidFill>
+                  <a:srgbClr val="1E1E1E"/>
+                </a:solidFill>
+                <a:latin typeface="Marianne"/>
+              </a:rPr>
+              <a:t>Le frein n'est jamais le modèle, c'est </a:t>
+            </a:r>
+            <a:r>
+              <a:rPr sz="1200" b="1">
+                <a:solidFill>
+                  <a:srgbClr val="000091"/>
+                </a:solidFill>
+                <a:latin typeface="Marianne"/>
+              </a:rPr>
+              <a:t>l'usage et l'outillage</a:t>
+            </a:r>
+            <a:r>
+              <a:rPr sz="1200" b="0">
+                <a:solidFill>
+                  <a:srgbClr val="1E1E1E"/>
+                </a:solidFill>
+                <a:latin typeface="Marianne"/>
+              </a:rPr>
+              <a:t>. Sur poste managé, un agent ne pouvait même pas installer un harness. L'adoption, elle, restait individuelle — sans pratique d'équipe.</a:t>
+            </a:r>
+          </a:p>
+        </p:txBody>
+      </p:sp>
+      <p:sp>
+        <p:nvSpPr>
+          <p:cNvPr id="8" name="Rectangle 7"/>
           <p:cNvSpPr/>
           <p:nvPr/>
         </p:nvSpPr>
         <p:spPr>
           <a:xfrm>
-            <a:off x="502920" y="2468880"/>
-            <a:ext cx="54864" cy="960120"/>
+            <a:off x="548640" y="2514600"/>
+            <a:ext cx="3584448" cy="2103120"/>
           </a:xfrm>
           <a:prstGeom prst="rect">
             <a:avLst/>
           </a:prstGeom>
           <a:solidFill>
-            <a:srgbClr val="000091"/>
+            <a:srgbClr val="F6F6F6"/>
           </a:solidFill>
-          <a:ln>
-            <a:noFill/>
+          <a:ln w="9525">
+            <a:solidFill>
+              <a:srgbClr val="DDDDDD"/>
+            </a:solidFill>
           </a:ln>
           <a:effectLst/>
         </p:spPr>
@@ -3357,23 +3421,151 @@
       </p:sp>
       <p:sp>
         <p:nvSpPr>
-          <p:cNvPr id="8" name="Rectangle 7"/>
+          <p:cNvPr id="9" name="TextBox 8"/>
+          <p:cNvSpPr txBox="1"/>
+          <p:nvPr/>
+        </p:nvSpPr>
+        <p:spPr>
+          <a:xfrm>
+            <a:off x="658368" y="2606040"/>
+            <a:ext cx="3364991" cy="274320"/>
+          </a:xfrm>
+          <a:prstGeom prst="rect">
+            <a:avLst/>
+          </a:prstGeom>
+          <a:noFill/>
+        </p:spPr>
+        <p:txBody>
+          <a:bodyPr wrap="square">
+            <a:spAutoFit/>
+          </a:bodyPr>
+          <a:lstStyle/>
+          <a:p>
+            <a:pPr algn="l">
+              <a:lnSpc>
+                <a:spcPct val="115000"/>
+              </a:lnSpc>
+              <a:spcAft>
+                <a:spcPts val="400"/>
+              </a:spcAft>
+            </a:pPr>
+            <a:r>
+              <a:rPr sz="1150" b="1">
+                <a:solidFill>
+                  <a:srgbClr val="000091"/>
+                </a:solidFill>
+                <a:latin typeface="Marianne"/>
+              </a:rPr>
+              <a:t>Un usage en silo</a:t>
+            </a:r>
+          </a:p>
+        </p:txBody>
+      </p:sp>
+      <p:sp>
+        <p:nvSpPr>
+          <p:cNvPr id="10" name="TextBox 9"/>
+          <p:cNvSpPr txBox="1"/>
+          <p:nvPr/>
+        </p:nvSpPr>
+        <p:spPr>
+          <a:xfrm>
+            <a:off x="658368" y="2862072"/>
+            <a:ext cx="3364991" cy="1682495"/>
+          </a:xfrm>
+          <a:prstGeom prst="rect">
+            <a:avLst/>
+          </a:prstGeom>
+          <a:noFill/>
+        </p:spPr>
+        <p:txBody>
+          <a:bodyPr wrap="square">
+            <a:spAutoFit/>
+          </a:bodyPr>
+          <a:lstStyle/>
+          <a:p>
+            <a:pPr algn="l">
+              <a:lnSpc>
+                <a:spcPct val="115000"/>
+              </a:lnSpc>
+              <a:spcAft>
+                <a:spcPts val="400"/>
+              </a:spcAft>
+            </a:pPr>
+            <a:r>
+              <a:rPr sz="1050" b="0">
+                <a:solidFill>
+                  <a:srgbClr val="2B2B2B"/>
+                </a:solidFill>
+                <a:latin typeface="Marianne"/>
+              </a:rPr>
+              <a:t>L'IA était pratiquée individuellement (développeurs de SIRENA, etc.), sans coordination ni mutualisation.</a:t>
+            </a:r>
+          </a:p>
+        </p:txBody>
+      </p:sp>
+      <p:sp>
+        <p:nvSpPr>
+          <p:cNvPr id="11" name="TextBox 10"/>
+          <p:cNvSpPr txBox="1"/>
+          <p:nvPr/>
+        </p:nvSpPr>
+        <p:spPr>
+          <a:xfrm>
+            <a:off x="658368" y="3319272"/>
+            <a:ext cx="3364991" cy="1225295"/>
+          </a:xfrm>
+          <a:prstGeom prst="rect">
+            <a:avLst/>
+          </a:prstGeom>
+          <a:noFill/>
+        </p:spPr>
+        <p:txBody>
+          <a:bodyPr wrap="square">
+            <a:spAutoFit/>
+          </a:bodyPr>
+          <a:lstStyle/>
+          <a:p>
+            <a:pPr algn="l">
+              <a:lnSpc>
+                <a:spcPct val="115000"/>
+              </a:lnSpc>
+              <a:spcAft>
+                <a:spcPts val="400"/>
+              </a:spcAft>
+            </a:pPr>
+            <a:r>
+              <a:rPr sz="1050" b="1">
+                <a:solidFill>
+                  <a:srgbClr val="7F7FC8"/>
+                </a:solidFill>
+                <a:latin typeface="Marianne"/>
+              </a:rPr>
+              <a:t>→ aucune pratique d'équipe partagée</a:t>
+            </a:r>
+          </a:p>
+        </p:txBody>
+      </p:sp>
+      <p:sp>
+        <p:nvSpPr>
+          <p:cNvPr id="12" name="Rectangle 11"/>
           <p:cNvSpPr/>
           <p:nvPr/>
         </p:nvSpPr>
         <p:spPr>
           <a:xfrm>
-            <a:off x="502920" y="3749039"/>
-            <a:ext cx="3611880" cy="2286000"/>
+            <a:off x="4311396" y="2514600"/>
+            <a:ext cx="3584448" cy="2103120"/>
           </a:xfrm>
           <a:prstGeom prst="rect">
             <a:avLst/>
           </a:prstGeom>
           <a:solidFill>
-            <a:srgbClr val="FFFFFF"/>
+            <a:srgbClr val="F6F6F6"/>
           </a:solidFill>
-          <a:ln>
-            <a:noFill/>
+          <a:ln w="9525">
+            <a:solidFill>
+              <a:srgbClr val="DDDDDD"/>
+            </a:solidFill>
           </a:ln>
           <a:effectLst/>
         </p:spPr>
@@ -3401,23 +3593,151 @@
       </p:sp>
       <p:sp>
         <p:nvSpPr>
-          <p:cNvPr id="9" name="Rectangle 8"/>
+          <p:cNvPr id="13" name="TextBox 12"/>
+          <p:cNvSpPr txBox="1"/>
+          <p:nvPr/>
+        </p:nvSpPr>
+        <p:spPr>
+          <a:xfrm>
+            <a:off x="4421124" y="2606040"/>
+            <a:ext cx="3364991" cy="274320"/>
+          </a:xfrm>
+          <a:prstGeom prst="rect">
+            <a:avLst/>
+          </a:prstGeom>
+          <a:noFill/>
+        </p:spPr>
+        <p:txBody>
+          <a:bodyPr wrap="square">
+            <a:spAutoFit/>
+          </a:bodyPr>
+          <a:lstStyle/>
+          <a:p>
+            <a:pPr algn="l">
+              <a:lnSpc>
+                <a:spcPct val="115000"/>
+              </a:lnSpc>
+              <a:spcAft>
+                <a:spcPts val="400"/>
+              </a:spcAft>
+            </a:pPr>
+            <a:r>
+              <a:rPr sz="1150" b="1">
+                <a:solidFill>
+                  <a:srgbClr val="000091"/>
+                </a:solidFill>
+                <a:latin typeface="Marianne"/>
+              </a:rPr>
+              <a:t>Des postes qui bloquaient</a:t>
+            </a:r>
+          </a:p>
+        </p:txBody>
+      </p:sp>
+      <p:sp>
+        <p:nvSpPr>
+          <p:cNvPr id="14" name="TextBox 13"/>
+          <p:cNvSpPr txBox="1"/>
+          <p:nvPr/>
+        </p:nvSpPr>
+        <p:spPr>
+          <a:xfrm>
+            <a:off x="4421124" y="2862072"/>
+            <a:ext cx="3364991" cy="1682495"/>
+          </a:xfrm>
+          <a:prstGeom prst="rect">
+            <a:avLst/>
+          </a:prstGeom>
+          <a:noFill/>
+        </p:spPr>
+        <p:txBody>
+          <a:bodyPr wrap="square">
+            <a:spAutoFit/>
+          </a:bodyPr>
+          <a:lstStyle/>
+          <a:p>
+            <a:pPr algn="l">
+              <a:lnSpc>
+                <a:spcPct val="115000"/>
+              </a:lnSpc>
+              <a:spcAft>
+                <a:spcPts val="400"/>
+              </a:spcAft>
+            </a:pPr>
+            <a:r>
+              <a:rPr sz="1050" b="0">
+                <a:solidFill>
+                  <a:srgbClr val="2B2B2B"/>
+                </a:solidFill>
+                <a:latin typeface="Marianne"/>
+              </a:rPr>
+              <a:t>Sur un poste interne managé, impossible d'installer un harness soi-même.</a:t>
+            </a:r>
+          </a:p>
+        </p:txBody>
+      </p:sp>
+      <p:sp>
+        <p:nvSpPr>
+          <p:cNvPr id="15" name="TextBox 14"/>
+          <p:cNvSpPr txBox="1"/>
+          <p:nvPr/>
+        </p:nvSpPr>
+        <p:spPr>
+          <a:xfrm>
+            <a:off x="4421124" y="3319272"/>
+            <a:ext cx="3364991" cy="1225295"/>
+          </a:xfrm>
+          <a:prstGeom prst="rect">
+            <a:avLst/>
+          </a:prstGeom>
+          <a:noFill/>
+        </p:spPr>
+        <p:txBody>
+          <a:bodyPr wrap="square">
+            <a:spAutoFit/>
+          </a:bodyPr>
+          <a:lstStyle/>
+          <a:p>
+            <a:pPr algn="l">
+              <a:lnSpc>
+                <a:spcPct val="115000"/>
+              </a:lnSpc>
+              <a:spcAft>
+                <a:spcPts val="400"/>
+              </a:spcAft>
+            </a:pPr>
+            <a:r>
+              <a:rPr sz="1050" b="1">
+                <a:solidFill>
+                  <a:srgbClr val="7F7FC8"/>
+                </a:solidFill>
+                <a:latin typeface="Marianne"/>
+              </a:rPr>
+              <a:t>→ adoption cantonnée aux prestataires</a:t>
+            </a:r>
+          </a:p>
+        </p:txBody>
+      </p:sp>
+      <p:sp>
+        <p:nvSpPr>
+          <p:cNvPr id="16" name="Rectangle 15"/>
           <p:cNvSpPr/>
           <p:nvPr/>
         </p:nvSpPr>
         <p:spPr>
           <a:xfrm>
-            <a:off x="502920" y="3749039"/>
-            <a:ext cx="3611880" cy="64008"/>
+            <a:off x="8074152" y="2514600"/>
+            <a:ext cx="3584448" cy="2103120"/>
           </a:xfrm>
           <a:prstGeom prst="rect">
             <a:avLst/>
           </a:prstGeom>
           <a:solidFill>
-            <a:srgbClr val="000091"/>
+            <a:srgbClr val="F6F6F6"/>
           </a:solidFill>
-          <a:ln>
-            <a:noFill/>
+          <a:ln w="9525">
+            <a:solidFill>
+              <a:srgbClr val="DDDDDD"/>
+            </a:solidFill>
           </a:ln>
           <a:effectLst/>
         </p:spPr>
@@ -3445,14 +3765,14 @@
       </p:sp>
       <p:sp>
         <p:nvSpPr>
-          <p:cNvPr id="10" name="TextBox 9"/>
+          <p:cNvPr id="17" name="TextBox 16"/>
           <p:cNvSpPr txBox="1"/>
           <p:nvPr/>
         </p:nvSpPr>
         <p:spPr>
           <a:xfrm>
-            <a:off x="685800" y="3913631"/>
-            <a:ext cx="3246120" cy="457200"/>
+            <a:off x="8183879" y="2606040"/>
+            <a:ext cx="3364991" cy="274320"/>
           </a:xfrm>
           <a:prstGeom prst="rect">
             <a:avLst/>
@@ -3460,46 +3780,7 @@
           <a:noFill/>
         </p:spPr>
         <p:txBody>
-          <a:bodyPr wrap="square" lIns="0" rIns="0" tIns="0" bIns="0">
-            <a:spAutoFit/>
-          </a:bodyPr>
-          <a:lstStyle/>
-          <a:p>
-            <a:pPr algn="l">
-              <a:spcAft>
-                <a:spcPts val="100"/>
-              </a:spcAft>
-            </a:pPr>
-            <a:r>
-              <a:rPr sz="1500" b="1">
-                <a:solidFill>
-                  <a:srgbClr val="000091"/>
-                </a:solidFill>
-                <a:latin typeface="Marianne"/>
-              </a:rPr>
-              <a:t>Un usage en silo</a:t>
-            </a:r>
-          </a:p>
-        </p:txBody>
-      </p:sp>
-      <p:sp>
-        <p:nvSpPr>
-          <p:cNvPr id="11" name="TextBox 10"/>
-          <p:cNvSpPr txBox="1"/>
-          <p:nvPr/>
-        </p:nvSpPr>
-        <p:spPr>
-          <a:xfrm>
-            <a:off x="685800" y="4416551"/>
-            <a:ext cx="3246120" cy="1481328"/>
-          </a:xfrm>
-          <a:prstGeom prst="rect">
-            <a:avLst/>
-          </a:prstGeom>
-          <a:noFill/>
-        </p:spPr>
-        <p:txBody>
-          <a:bodyPr wrap="square" lIns="0" rIns="0" tIns="0" bIns="0">
+          <a:bodyPr wrap="square">
             <a:spAutoFit/>
           </a:bodyPr>
           <a:lstStyle/>
@@ -3509,138 +3790,73 @@
                 <a:spcPct val="115000"/>
               </a:lnSpc>
               <a:spcAft>
-                <a:spcPts val="500"/>
+                <a:spcPts val="400"/>
               </a:spcAft>
             </a:pPr>
             <a:r>
-              <a:rPr sz="1300" b="0">
-                <a:solidFill>
-                  <a:srgbClr val="2B2B2B"/>
-                </a:solidFill>
-                <a:latin typeface="Marianne"/>
-              </a:rPr>
-              <a:t>L'IA était pratiquée individuellement, sans coordination ni mutualisation.</a:t>
-            </a:r>
-          </a:p>
+              <a:rPr sz="1150" b="1">
+                <a:solidFill>
+                  <a:srgbClr val="000091"/>
+                </a:solidFill>
+                <a:latin typeface="Marianne"/>
+              </a:rPr>
+              <a:t>Une opportunité non vue</a:t>
+            </a:r>
+          </a:p>
+        </p:txBody>
+      </p:sp>
+      <p:sp>
+        <p:nvSpPr>
+          <p:cNvPr id="18" name="TextBox 17"/>
+          <p:cNvSpPr txBox="1"/>
+          <p:nvPr/>
+        </p:nvSpPr>
+        <p:spPr>
+          <a:xfrm>
+            <a:off x="8183879" y="2862072"/>
+            <a:ext cx="3364991" cy="1682495"/>
+          </a:xfrm>
+          <a:prstGeom prst="rect">
+            <a:avLst/>
+          </a:prstGeom>
+          <a:noFill/>
+        </p:spPr>
+        <p:txBody>
+          <a:bodyPr wrap="square">
+            <a:spAutoFit/>
+          </a:bodyPr>
+          <a:lstStyle/>
           <a:p>
             <a:pPr algn="l">
               <a:lnSpc>
                 <a:spcPct val="115000"/>
               </a:lnSpc>
               <a:spcAft>
-                <a:spcPts val="500"/>
+                <a:spcPts val="400"/>
               </a:spcAft>
             </a:pPr>
             <a:r>
-              <a:rPr sz="1300" b="0">
+              <a:rPr sz="1050" b="0">
                 <a:solidFill>
                   <a:srgbClr val="2B2B2B"/>
                 </a:solidFill>
                 <a:latin typeface="Marianne"/>
               </a:rPr>
-              <a:t>Aucune pratique d'équipe partagée.</a:t>
-            </a:r>
-          </a:p>
-        </p:txBody>
-      </p:sp>
-      <p:sp>
-        <p:nvSpPr>
-          <p:cNvPr id="12" name="Rectangle 11"/>
-          <p:cNvSpPr/>
-          <p:nvPr/>
-        </p:nvSpPr>
-        <p:spPr>
-          <a:xfrm>
-            <a:off x="4297680" y="3749039"/>
-            <a:ext cx="3611880" cy="2286000"/>
-          </a:xfrm>
-          <a:prstGeom prst="rect">
-            <a:avLst/>
-          </a:prstGeom>
-          <a:solidFill>
-            <a:srgbClr val="FFFFFF"/>
-          </a:solidFill>
-          <a:ln>
-            <a:noFill/>
-          </a:ln>
-          <a:effectLst/>
-        </p:spPr>
-        <p:style>
-          <a:lnRef idx="1">
-            <a:schemeClr val="accent1"/>
-          </a:lnRef>
-          <a:fillRef idx="3">
-            <a:schemeClr val="accent1"/>
-          </a:fillRef>
-          <a:effectRef idx="2">
-            <a:schemeClr val="accent1"/>
-          </a:effectRef>
-          <a:fontRef idx="minor">
-            <a:schemeClr val="lt1"/>
-          </a:fontRef>
-        </p:style>
-        <p:txBody>
-          <a:bodyPr rtlCol="0" anchor="ctr"/>
-          <a:lstStyle/>
-          <a:p>
-            <a:pPr algn="ctr"/>
-          </a:p>
-        </p:txBody>
-      </p:sp>
-      <p:sp>
-        <p:nvSpPr>
-          <p:cNvPr id="13" name="Rectangle 12"/>
-          <p:cNvSpPr/>
-          <p:nvPr/>
-        </p:nvSpPr>
-        <p:spPr>
-          <a:xfrm>
-            <a:off x="4297680" y="3749039"/>
-            <a:ext cx="3611880" cy="64008"/>
-          </a:xfrm>
-          <a:prstGeom prst="rect">
-            <a:avLst/>
-          </a:prstGeom>
-          <a:solidFill>
-            <a:srgbClr val="000091"/>
-          </a:solidFill>
-          <a:ln>
-            <a:noFill/>
-          </a:ln>
-          <a:effectLst/>
-        </p:spPr>
-        <p:style>
-          <a:lnRef idx="1">
-            <a:schemeClr val="accent1"/>
-          </a:lnRef>
-          <a:fillRef idx="3">
-            <a:schemeClr val="accent1"/>
-          </a:fillRef>
-          <a:effectRef idx="2">
-            <a:schemeClr val="accent1"/>
-          </a:effectRef>
-          <a:fontRef idx="minor">
-            <a:schemeClr val="lt1"/>
-          </a:fontRef>
-        </p:style>
-        <p:txBody>
-          <a:bodyPr rtlCol="0" anchor="ctr"/>
-          <a:lstStyle/>
-          <a:p>
-            <a:pPr algn="ctr"/>
-          </a:p>
-        </p:txBody>
-      </p:sp>
-      <p:sp>
-        <p:nvSpPr>
-          <p:cNvPr id="14" name="TextBox 13"/>
+              <a:t>Les métiers ne connaissaient pas leurs propres cas d'usage potentiels.</a:t>
+            </a:r>
+          </a:p>
+        </p:txBody>
+      </p:sp>
+      <p:sp>
+        <p:nvSpPr>
+          <p:cNvPr id="19" name="TextBox 18"/>
           <p:cNvSpPr txBox="1"/>
           <p:nvPr/>
         </p:nvSpPr>
         <p:spPr>
           <a:xfrm>
-            <a:off x="4480560" y="3913631"/>
-            <a:ext cx="3246120" cy="457200"/>
+            <a:off x="8183879" y="3319272"/>
+            <a:ext cx="3364991" cy="1225295"/>
           </a:xfrm>
           <a:prstGeom prst="rect">
             <a:avLst/>
@@ -3648,46 +3864,7 @@
           <a:noFill/>
         </p:spPr>
         <p:txBody>
-          <a:bodyPr wrap="square" lIns="0" rIns="0" tIns="0" bIns="0">
-            <a:spAutoFit/>
-          </a:bodyPr>
-          <a:lstStyle/>
-          <a:p>
-            <a:pPr algn="l">
-              <a:spcAft>
-                <a:spcPts val="100"/>
-              </a:spcAft>
-            </a:pPr>
-            <a:r>
-              <a:rPr sz="1500" b="1">
-                <a:solidFill>
-                  <a:srgbClr val="000091"/>
-                </a:solidFill>
-                <a:latin typeface="Marianne"/>
-              </a:rPr>
-              <a:t>Des postes qui bloquent</a:t>
-            </a:r>
-          </a:p>
-        </p:txBody>
-      </p:sp>
-      <p:sp>
-        <p:nvSpPr>
-          <p:cNvPr id="15" name="TextBox 14"/>
-          <p:cNvSpPr txBox="1"/>
-          <p:nvPr/>
-        </p:nvSpPr>
-        <p:spPr>
-          <a:xfrm>
-            <a:off x="4480560" y="4416551"/>
-            <a:ext cx="3246120" cy="1481328"/>
-          </a:xfrm>
-          <a:prstGeom prst="rect">
-            <a:avLst/>
-          </a:prstGeom>
-          <a:noFill/>
-        </p:spPr>
-        <p:txBody>
-          <a:bodyPr wrap="square" lIns="0" rIns="0" tIns="0" bIns="0">
+          <a:bodyPr wrap="square">
             <a:spAutoFit/>
           </a:bodyPr>
           <a:lstStyle/>
@@ -3697,224 +3874,17 @@
                 <a:spcPct val="115000"/>
               </a:lnSpc>
               <a:spcAft>
-                <a:spcPts val="500"/>
+                <a:spcPts val="400"/>
               </a:spcAft>
             </a:pPr>
             <a:r>
-              <a:rPr sz="1300" b="0">
-                <a:solidFill>
-                  <a:srgbClr val="2B2B2B"/>
-                </a:solidFill>
-                <a:latin typeface="Marianne"/>
-              </a:rPr>
-              <a:t>Sur un poste interne managé, impossible d'installer un harness soi-même.</a:t>
-            </a:r>
-          </a:p>
-          <a:p>
-            <a:pPr algn="l">
-              <a:lnSpc>
-                <a:spcPct val="115000"/>
-              </a:lnSpc>
-              <a:spcAft>
-                <a:spcPts val="500"/>
-              </a:spcAft>
-            </a:pPr>
-            <a:r>
-              <a:rPr sz="1300" b="0">
-                <a:solidFill>
-                  <a:srgbClr val="2B2B2B"/>
-                </a:solidFill>
-                <a:latin typeface="Marianne"/>
-              </a:rPr>
-              <a:t>Adoption cantonnée aux prestataires.</a:t>
-            </a:r>
-          </a:p>
-        </p:txBody>
-      </p:sp>
-      <p:sp>
-        <p:nvSpPr>
-          <p:cNvPr id="16" name="Rectangle 15"/>
-          <p:cNvSpPr/>
-          <p:nvPr/>
-        </p:nvSpPr>
-        <p:spPr>
-          <a:xfrm>
-            <a:off x="8092440" y="3749039"/>
-            <a:ext cx="3611880" cy="2286000"/>
-          </a:xfrm>
-          <a:prstGeom prst="rect">
-            <a:avLst/>
-          </a:prstGeom>
-          <a:solidFill>
-            <a:srgbClr val="FFFFFF"/>
-          </a:solidFill>
-          <a:ln>
-            <a:noFill/>
-          </a:ln>
-          <a:effectLst/>
-        </p:spPr>
-        <p:style>
-          <a:lnRef idx="1">
-            <a:schemeClr val="accent1"/>
-          </a:lnRef>
-          <a:fillRef idx="3">
-            <a:schemeClr val="accent1"/>
-          </a:fillRef>
-          <a:effectRef idx="2">
-            <a:schemeClr val="accent1"/>
-          </a:effectRef>
-          <a:fontRef idx="minor">
-            <a:schemeClr val="lt1"/>
-          </a:fontRef>
-        </p:style>
-        <p:txBody>
-          <a:bodyPr rtlCol="0" anchor="ctr"/>
-          <a:lstStyle/>
-          <a:p>
-            <a:pPr algn="ctr"/>
-          </a:p>
-        </p:txBody>
-      </p:sp>
-      <p:sp>
-        <p:nvSpPr>
-          <p:cNvPr id="17" name="Rectangle 16"/>
-          <p:cNvSpPr/>
-          <p:nvPr/>
-        </p:nvSpPr>
-        <p:spPr>
-          <a:xfrm>
-            <a:off x="8092440" y="3749039"/>
-            <a:ext cx="3611880" cy="64008"/>
-          </a:xfrm>
-          <a:prstGeom prst="rect">
-            <a:avLst/>
-          </a:prstGeom>
-          <a:solidFill>
-            <a:srgbClr val="000091"/>
-          </a:solidFill>
-          <a:ln>
-            <a:noFill/>
-          </a:ln>
-          <a:effectLst/>
-        </p:spPr>
-        <p:style>
-          <a:lnRef idx="1">
-            <a:schemeClr val="accent1"/>
-          </a:lnRef>
-          <a:fillRef idx="3">
-            <a:schemeClr val="accent1"/>
-          </a:fillRef>
-          <a:effectRef idx="2">
-            <a:schemeClr val="accent1"/>
-          </a:effectRef>
-          <a:fontRef idx="minor">
-            <a:schemeClr val="lt1"/>
-          </a:fontRef>
-        </p:style>
-        <p:txBody>
-          <a:bodyPr rtlCol="0" anchor="ctr"/>
-          <a:lstStyle/>
-          <a:p>
-            <a:pPr algn="ctr"/>
-          </a:p>
-        </p:txBody>
-      </p:sp>
-      <p:sp>
-        <p:nvSpPr>
-          <p:cNvPr id="18" name="TextBox 17"/>
-          <p:cNvSpPr txBox="1"/>
-          <p:nvPr/>
-        </p:nvSpPr>
-        <p:spPr>
-          <a:xfrm>
-            <a:off x="8275319" y="3913631"/>
-            <a:ext cx="3246120" cy="457200"/>
-          </a:xfrm>
-          <a:prstGeom prst="rect">
-            <a:avLst/>
-          </a:prstGeom>
-          <a:noFill/>
-        </p:spPr>
-        <p:txBody>
-          <a:bodyPr wrap="square" lIns="0" rIns="0" tIns="0" bIns="0">
-            <a:spAutoFit/>
-          </a:bodyPr>
-          <a:lstStyle/>
-          <a:p>
-            <a:pPr algn="l">
-              <a:spcAft>
-                <a:spcPts val="100"/>
-              </a:spcAft>
-            </a:pPr>
-            <a:r>
-              <a:rPr sz="1500" b="1">
-                <a:solidFill>
-                  <a:srgbClr val="000091"/>
-                </a:solidFill>
-                <a:latin typeface="Marianne"/>
-              </a:rPr>
-              <a:t>Une opportunité non vue</a:t>
-            </a:r>
-          </a:p>
-        </p:txBody>
-      </p:sp>
-      <p:sp>
-        <p:nvSpPr>
-          <p:cNvPr id="19" name="TextBox 18"/>
-          <p:cNvSpPr txBox="1"/>
-          <p:nvPr/>
-        </p:nvSpPr>
-        <p:spPr>
-          <a:xfrm>
-            <a:off x="8275319" y="4416551"/>
-            <a:ext cx="3246120" cy="1481328"/>
-          </a:xfrm>
-          <a:prstGeom prst="rect">
-            <a:avLst/>
-          </a:prstGeom>
-          <a:noFill/>
-        </p:spPr>
-        <p:txBody>
-          <a:bodyPr wrap="square" lIns="0" rIns="0" tIns="0" bIns="0">
-            <a:spAutoFit/>
-          </a:bodyPr>
-          <a:lstStyle/>
-          <a:p>
-            <a:pPr algn="l">
-              <a:lnSpc>
-                <a:spcPct val="115000"/>
-              </a:lnSpc>
-              <a:spcAft>
-                <a:spcPts val="500"/>
-              </a:spcAft>
-            </a:pPr>
-            <a:r>
-              <a:rPr sz="1300" b="0">
-                <a:solidFill>
-                  <a:srgbClr val="2B2B2B"/>
-                </a:solidFill>
-                <a:latin typeface="Marianne"/>
-              </a:rPr>
-              <a:t>Les métiers ne connaissaient pas leurs propres cas d'usage potentiels.</a:t>
-            </a:r>
-          </a:p>
-          <a:p>
-            <a:pPr algn="l">
-              <a:lnSpc>
-                <a:spcPct val="115000"/>
-              </a:lnSpc>
-              <a:spcAft>
-                <a:spcPts val="500"/>
-              </a:spcAft>
-            </a:pPr>
-            <a:r>
-              <a:rPr sz="1300" b="0">
-                <a:solidFill>
-                  <a:srgbClr val="2B2B2B"/>
-                </a:solidFill>
-                <a:latin typeface="Marianne"/>
-              </a:rPr>
-              <a:t>L'acculturation pouvait créer la demande.</a:t>
+              <a:rPr sz="1050" b="1">
+                <a:solidFill>
+                  <a:srgbClr val="7F7FC8"/>
+                </a:solidFill>
+                <a:latin typeface="Marianne"/>
+              </a:rPr>
+              <a:t>→ l'acculturation pouvait créer la demande</a:t>
             </a:r>
           </a:p>
         </p:txBody>
@@ -3939,23 +3909,160 @@
       <p:grpSpPr/>
       <p:sp>
         <p:nvSpPr>
-          <p:cNvPr id="2" name="Rectangle 1"/>
+          <p:cNvPr id="2" name="TextBox 1"/>
+          <p:cNvSpPr txBox="1"/>
+          <p:nvPr/>
+        </p:nvSpPr>
+        <p:spPr>
+          <a:xfrm>
+            <a:off x="548640" y="292608"/>
+            <a:ext cx="10058400" cy="228600"/>
+          </a:xfrm>
+          <a:prstGeom prst="rect">
+            <a:avLst/>
+          </a:prstGeom>
+          <a:noFill/>
+        </p:spPr>
+        <p:txBody>
+          <a:bodyPr wrap="square">
+            <a:spAutoFit/>
+          </a:bodyPr>
+          <a:lstStyle/>
+          <a:p>
+            <a:pPr algn="l">
+              <a:lnSpc>
+                <a:spcPct val="115000"/>
+              </a:lnSpc>
+              <a:spcAft>
+                <a:spcPts val="400"/>
+              </a:spcAft>
+            </a:pPr>
+            <a:r>
+              <a:rPr sz="950" b="1">
+                <a:solidFill>
+                  <a:srgbClr val="000091"/>
+                </a:solidFill>
+                <a:latin typeface="Marianne"/>
+              </a:rPr>
+              <a:t>LE DÉCLIC · ACCOMPAGNER CHAQUE MÉTIER</a:t>
+            </a:r>
+          </a:p>
+        </p:txBody>
+      </p:sp>
+      <p:sp>
+        <p:nvSpPr>
+          <p:cNvPr id="3" name="TextBox 2"/>
+          <p:cNvSpPr txBox="1"/>
+          <p:nvPr/>
+        </p:nvSpPr>
+        <p:spPr>
+          <a:xfrm>
+            <a:off x="548640" y="530352"/>
+            <a:ext cx="11064240" cy="685800"/>
+          </a:xfrm>
+          <a:prstGeom prst="rect">
+            <a:avLst/>
+          </a:prstGeom>
+          <a:noFill/>
+        </p:spPr>
+        <p:txBody>
+          <a:bodyPr wrap="square">
+            <a:spAutoFit/>
+          </a:bodyPr>
+          <a:lstStyle/>
+          <a:p>
+            <a:pPr algn="l">
+              <a:lnSpc>
+                <a:spcPct val="115000"/>
+              </a:lnSpc>
+              <a:spcAft>
+                <a:spcPts val="400"/>
+              </a:spcAft>
+            </a:pPr>
+            <a:r>
+              <a:rPr sz="2600" b="1">
+                <a:solidFill>
+                  <a:srgbClr val="000091"/>
+                </a:solidFill>
+                <a:latin typeface="Marianne"/>
+              </a:rPr>
+              <a:t>On accompagne les rôles,</a:t>
+            </a:r>
+            <a:r>
+              <a:rPr sz="2600" b="0">
+                <a:solidFill>
+                  <a:srgbClr val="666666"/>
+                </a:solidFill>
+                <a:latin typeface="Marianne"/>
+              </a:rPr>
+              <a:t> la demande devient entrante.</a:t>
+            </a:r>
+          </a:p>
+        </p:txBody>
+      </p:sp>
+      <p:sp>
+        <p:nvSpPr>
+          <p:cNvPr id="4" name="TextBox 3"/>
+          <p:cNvSpPr txBox="1"/>
+          <p:nvPr/>
+        </p:nvSpPr>
+        <p:spPr>
+          <a:xfrm>
+            <a:off x="10881360" y="292608"/>
+            <a:ext cx="822960" cy="228600"/>
+          </a:xfrm>
+          <a:prstGeom prst="rect">
+            <a:avLst/>
+          </a:prstGeom>
+          <a:noFill/>
+        </p:spPr>
+        <p:txBody>
+          <a:bodyPr wrap="square">
+            <a:spAutoFit/>
+          </a:bodyPr>
+          <a:lstStyle/>
+          <a:p>
+            <a:pPr algn="r">
+              <a:lnSpc>
+                <a:spcPct val="115000"/>
+              </a:lnSpc>
+              <a:spcAft>
+                <a:spcPts val="400"/>
+              </a:spcAft>
+            </a:pPr>
+            <a:r>
+              <a:rPr sz="950" b="1">
+                <a:solidFill>
+                  <a:srgbClr val="7F7FC8"/>
+                </a:solidFill>
+                <a:latin typeface="Marianne"/>
+              </a:rPr>
+              <a:t>2 / 3</a:t>
+            </a:r>
+          </a:p>
+        </p:txBody>
+      </p:sp>
+      <p:sp>
+        <p:nvSpPr>
+          <p:cNvPr id="5" name="Rectangle 4"/>
           <p:cNvSpPr/>
           <p:nvPr/>
         </p:nvSpPr>
         <p:spPr>
           <a:xfrm>
-            <a:off x="502920" y="502920"/>
-            <a:ext cx="11201400" cy="41148"/>
+            <a:off x="548640" y="1481328"/>
+            <a:ext cx="3584448" cy="2331720"/>
           </a:xfrm>
           <a:prstGeom prst="rect">
             <a:avLst/>
           </a:prstGeom>
           <a:solidFill>
-            <a:srgbClr val="000091"/>
+            <a:srgbClr val="F6F6F6"/>
           </a:solidFill>
-          <a:ln>
-            <a:noFill/>
+          <a:ln w="9525">
+            <a:solidFill>
+              <a:srgbClr val="DDDDDD"/>
+            </a:solidFill>
           </a:ln>
           <a:effectLst/>
         </p:spPr>
@@ -3983,14 +4090,14 @@
       </p:sp>
       <p:sp>
         <p:nvSpPr>
-          <p:cNvPr id="3" name="TextBox 2"/>
+          <p:cNvPr id="6" name="TextBox 5"/>
           <p:cNvSpPr txBox="1"/>
           <p:nvPr/>
         </p:nvSpPr>
         <p:spPr>
           <a:xfrm>
-            <a:off x="502920" y="731520"/>
-            <a:ext cx="10058400" cy="365760"/>
+            <a:off x="658368" y="1572768"/>
+            <a:ext cx="3364991" cy="274320"/>
           </a:xfrm>
           <a:prstGeom prst="rect">
             <a:avLst/>
@@ -3998,38 +4105,41 @@
           <a:noFill/>
         </p:spPr>
         <p:txBody>
-          <a:bodyPr wrap="square" lIns="0" rIns="0" tIns="0" bIns="0">
+          <a:bodyPr wrap="square">
             <a:spAutoFit/>
           </a:bodyPr>
           <a:lstStyle/>
           <a:p>
             <a:pPr algn="l">
+              <a:lnSpc>
+                <a:spcPct val="115000"/>
+              </a:lnSpc>
               <a:spcAft>
-                <a:spcPts val="600"/>
+                <a:spcPts val="400"/>
               </a:spcAft>
             </a:pPr>
             <a:r>
-              <a:rPr sz="1300" b="1">
-                <a:solidFill>
-                  <a:srgbClr val="7F7FC8"/>
-                </a:solidFill>
-                <a:latin typeface="Marianne"/>
-              </a:rPr>
-              <a:t>LE DÉCLIC · ACCOMPAGNER CHAQUE MÉTIER</a:t>
-            </a:r>
-          </a:p>
-        </p:txBody>
-      </p:sp>
-      <p:sp>
-        <p:nvSpPr>
-          <p:cNvPr id="4" name="TextBox 3"/>
+              <a:rPr sz="1150" b="1">
+                <a:solidFill>
+                  <a:srgbClr val="000091"/>
+                </a:solidFill>
+                <a:latin typeface="Marianne"/>
+              </a:rPr>
+              <a:t>Développeurs · Egapro</a:t>
+            </a:r>
+          </a:p>
+        </p:txBody>
+      </p:sp>
+      <p:sp>
+        <p:nvSpPr>
+          <p:cNvPr id="7" name="TextBox 6"/>
           <p:cNvSpPr txBox="1"/>
           <p:nvPr/>
         </p:nvSpPr>
         <p:spPr>
           <a:xfrm>
-            <a:off x="10424160" y="658368"/>
-            <a:ext cx="1280160" cy="365760"/>
+            <a:off x="658368" y="1828800"/>
+            <a:ext cx="3364991" cy="228600"/>
           </a:xfrm>
           <a:prstGeom prst="rect">
             <a:avLst/>
@@ -4037,38 +4147,41 @@
           <a:noFill/>
         </p:spPr>
         <p:txBody>
-          <a:bodyPr wrap="square" lIns="0" rIns="0" tIns="0" bIns="0">
+          <a:bodyPr wrap="square">
             <a:spAutoFit/>
           </a:bodyPr>
           <a:lstStyle/>
           <a:p>
-            <a:pPr algn="r">
+            <a:pPr algn="l">
+              <a:lnSpc>
+                <a:spcPct val="115000"/>
+              </a:lnSpc>
               <a:spcAft>
-                <a:spcPts val="600"/>
+                <a:spcPts val="400"/>
               </a:spcAft>
             </a:pPr>
             <a:r>
-              <a:rPr sz="1200" b="1">
-                <a:solidFill>
-                  <a:srgbClr val="7F7FC8"/>
-                </a:solidFill>
-                <a:latin typeface="Marianne"/>
-              </a:rPr>
-              <a:t>2 / 3</a:t>
-            </a:r>
-          </a:p>
-        </p:txBody>
-      </p:sp>
-      <p:sp>
-        <p:nvSpPr>
-          <p:cNvPr id="5" name="TextBox 4"/>
+              <a:rPr sz="850" b="1">
+                <a:solidFill>
+                  <a:srgbClr val="666666"/>
+                </a:solidFill>
+                <a:latin typeface="Marianne"/>
+              </a:rPr>
+              <a:t>pilote : 3 → 4 en maturité</a:t>
+            </a:r>
+          </a:p>
+        </p:txBody>
+      </p:sp>
+      <p:sp>
+        <p:nvSpPr>
+          <p:cNvPr id="8" name="TextBox 7"/>
           <p:cNvSpPr txBox="1"/>
           <p:nvPr/>
         </p:nvSpPr>
         <p:spPr>
           <a:xfrm>
-            <a:off x="502920" y="1097280"/>
-            <a:ext cx="11201400" cy="1143000"/>
+            <a:off x="658368" y="2066543"/>
+            <a:ext cx="3364991" cy="1673352"/>
           </a:xfrm>
           <a:prstGeom prst="rect">
             <a:avLst/>
@@ -4076,50 +4189,70 @@
           <a:noFill/>
         </p:spPr>
         <p:txBody>
-          <a:bodyPr wrap="square" lIns="0" rIns="0" tIns="0" bIns="0">
+          <a:bodyPr wrap="square">
             <a:spAutoFit/>
           </a:bodyPr>
           <a:lstStyle/>
           <a:p>
             <a:pPr algn="l">
               <a:lnSpc>
-                <a:spcPct val="105000"/>
+                <a:spcPct val="115000"/>
               </a:lnSpc>
               <a:spcAft>
-                <a:spcPts val="600"/>
+                <a:spcPts val="400"/>
               </a:spcAft>
             </a:pPr>
             <a:r>
-              <a:rPr sz="3200" b="1">
-                <a:solidFill>
-                  <a:srgbClr val="000091"/>
-                </a:solidFill>
-                <a:latin typeface="Marianne"/>
-              </a:rPr>
-              <a:t>On accompagne les rôles, la demande devient entrante.</a:t>
-            </a:r>
-          </a:p>
-        </p:txBody>
-      </p:sp>
-      <p:sp>
-        <p:nvSpPr>
-          <p:cNvPr id="6" name="Rectangle 5"/>
+              <a:rPr sz="1000" b="0">
+                <a:solidFill>
+                  <a:srgbClr val="2B2B2B"/>
+                </a:solidFill>
+                <a:latin typeface="Marianne"/>
+              </a:rPr>
+              <a:t>Orchestrations en routine, désormais </a:t>
+            </a:r>
+            <a:r>
+              <a:rPr sz="1000" b="1">
+                <a:solidFill>
+                  <a:srgbClr val="1E1E1E"/>
+                </a:solidFill>
+                <a:latin typeface="Marianne"/>
+              </a:rPr>
+              <a:t>sécurisées</a:t>
+            </a:r>
+            <a:r>
+              <a:rPr sz="1000" b="0">
+                <a:solidFill>
+                  <a:srgbClr val="2B2B2B"/>
+                </a:solidFill>
+                <a:latin typeface="Marianne"/>
+              </a:rPr>
+              <a:t> : codeur et testeur séparés. Le chef de projet pilote à la vitesse de l'IA (estimations T-shirt, tickets design).</a:t>
+            </a:r>
+          </a:p>
+        </p:txBody>
+      </p:sp>
+      <p:sp>
+        <p:nvSpPr>
+          <p:cNvPr id="9" name="Rectangle 8"/>
           <p:cNvSpPr/>
           <p:nvPr/>
         </p:nvSpPr>
         <p:spPr>
           <a:xfrm>
-            <a:off x="502920" y="2606040"/>
-            <a:ext cx="5486400" cy="3383280"/>
+            <a:off x="4311396" y="1481328"/>
+            <a:ext cx="3584448" cy="2331720"/>
           </a:xfrm>
           <a:prstGeom prst="rect">
             <a:avLst/>
           </a:prstGeom>
           <a:solidFill>
-            <a:srgbClr val="FFFFFF"/>
+            <a:srgbClr val="F6F6F6"/>
           </a:solidFill>
-          <a:ln>
-            <a:noFill/>
+          <a:ln w="9525">
+            <a:solidFill>
+              <a:srgbClr val="DDDDDD"/>
+            </a:solidFill>
           </a:ln>
           <a:effectLst/>
         </p:spPr>
@@ -4147,23 +4280,169 @@
       </p:sp>
       <p:sp>
         <p:nvSpPr>
-          <p:cNvPr id="7" name="Rectangle 6"/>
+          <p:cNvPr id="10" name="TextBox 9"/>
+          <p:cNvSpPr txBox="1"/>
+          <p:nvPr/>
+        </p:nvSpPr>
+        <p:spPr>
+          <a:xfrm>
+            <a:off x="4421124" y="1572768"/>
+            <a:ext cx="3364991" cy="274320"/>
+          </a:xfrm>
+          <a:prstGeom prst="rect">
+            <a:avLst/>
+          </a:prstGeom>
+          <a:noFill/>
+        </p:spPr>
+        <p:txBody>
+          <a:bodyPr wrap="square">
+            <a:spAutoFit/>
+          </a:bodyPr>
+          <a:lstStyle/>
+          <a:p>
+            <a:pPr algn="l">
+              <a:lnSpc>
+                <a:spcPct val="115000"/>
+              </a:lnSpc>
+              <a:spcAft>
+                <a:spcPts val="400"/>
+              </a:spcAft>
+            </a:pPr>
+            <a:r>
+              <a:rPr sz="1150" b="1">
+                <a:solidFill>
+                  <a:srgbClr val="000091"/>
+                </a:solidFill>
+                <a:latin typeface="Marianne"/>
+              </a:rPr>
+              <a:t>Développeurs · DACCORD</a:t>
+            </a:r>
+          </a:p>
+        </p:txBody>
+      </p:sp>
+      <p:sp>
+        <p:nvSpPr>
+          <p:cNvPr id="11" name="TextBox 10"/>
+          <p:cNvSpPr txBox="1"/>
+          <p:nvPr/>
+        </p:nvSpPr>
+        <p:spPr>
+          <a:xfrm>
+            <a:off x="4421124" y="1828800"/>
+            <a:ext cx="3364991" cy="228600"/>
+          </a:xfrm>
+          <a:prstGeom prst="rect">
+            <a:avLst/>
+          </a:prstGeom>
+          <a:noFill/>
+        </p:spPr>
+        <p:txBody>
+          <a:bodyPr wrap="square">
+            <a:spAutoFit/>
+          </a:bodyPr>
+          <a:lstStyle/>
+          <a:p>
+            <a:pPr algn="l">
+              <a:lnSpc>
+                <a:spcPct val="115000"/>
+              </a:lnSpc>
+              <a:spcAft>
+                <a:spcPts val="400"/>
+              </a:spcAft>
+            </a:pPr>
+            <a:r>
+              <a:rPr sz="850" b="1">
+                <a:solidFill>
+                  <a:srgbClr val="666666"/>
+                </a:solidFill>
+                <a:latin typeface="Marianne"/>
+              </a:rPr>
+              <a:t>objectif : sa propre orchestration</a:t>
+            </a:r>
+          </a:p>
+        </p:txBody>
+      </p:sp>
+      <p:sp>
+        <p:nvSpPr>
+          <p:cNvPr id="12" name="TextBox 11"/>
+          <p:cNvSpPr txBox="1"/>
+          <p:nvPr/>
+        </p:nvSpPr>
+        <p:spPr>
+          <a:xfrm>
+            <a:off x="4421124" y="2066543"/>
+            <a:ext cx="3364991" cy="1673352"/>
+          </a:xfrm>
+          <a:prstGeom prst="rect">
+            <a:avLst/>
+          </a:prstGeom>
+          <a:noFill/>
+        </p:spPr>
+        <p:txBody>
+          <a:bodyPr wrap="square">
+            <a:spAutoFit/>
+          </a:bodyPr>
+          <a:lstStyle/>
+          <a:p>
+            <a:pPr algn="l">
+              <a:lnSpc>
+                <a:spcPct val="115000"/>
+              </a:lnSpc>
+              <a:spcAft>
+                <a:spcPts val="400"/>
+              </a:spcAft>
+            </a:pPr>
+            <a:r>
+              <a:rPr sz="1000" b="0">
+                <a:solidFill>
+                  <a:srgbClr val="2B2B2B"/>
+                </a:solidFill>
+                <a:latin typeface="Marianne"/>
+              </a:rPr>
+              <a:t>Dès le lundi suivant le coaching, </a:t>
+            </a:r>
+            <a:r>
+              <a:rPr sz="1000" b="1">
+                <a:solidFill>
+                  <a:srgbClr val="1E1E1E"/>
+                </a:solidFill>
+                <a:latin typeface="Marianne"/>
+              </a:rPr>
+              <a:t>l'équipe met ses system prompts en commun d'elle-même</a:t>
+            </a:r>
+            <a:r>
+              <a:rPr sz="1000" b="0">
+                <a:solidFill>
+                  <a:srgbClr val="2B2B2B"/>
+                </a:solidFill>
+                <a:latin typeface="Marianne"/>
+              </a:rPr>
+              <a:t>. Skills sur cinq domaines (6/08), orchestration en accompagnement individuel.</a:t>
+            </a:r>
+          </a:p>
+        </p:txBody>
+      </p:sp>
+      <p:sp>
+        <p:nvSpPr>
+          <p:cNvPr id="13" name="Rectangle 12"/>
           <p:cNvSpPr/>
           <p:nvPr/>
         </p:nvSpPr>
         <p:spPr>
           <a:xfrm>
-            <a:off x="502920" y="2606040"/>
-            <a:ext cx="5486400" cy="64008"/>
+            <a:off x="8074152" y="1481328"/>
+            <a:ext cx="3584448" cy="2331720"/>
           </a:xfrm>
           <a:prstGeom prst="rect">
             <a:avLst/>
           </a:prstGeom>
           <a:solidFill>
-            <a:srgbClr val="000091"/>
+            <a:srgbClr val="F6F6F6"/>
           </a:solidFill>
-          <a:ln>
-            <a:noFill/>
+          <a:ln w="9525">
+            <a:solidFill>
+              <a:srgbClr val="DDDDDD"/>
+            </a:solidFill>
           </a:ln>
           <a:effectLst/>
         </p:spPr>
@@ -4191,14 +4470,14 @@
       </p:sp>
       <p:sp>
         <p:nvSpPr>
-          <p:cNvPr id="8" name="TextBox 7"/>
+          <p:cNvPr id="14" name="TextBox 13"/>
           <p:cNvSpPr txBox="1"/>
           <p:nvPr/>
         </p:nvSpPr>
         <p:spPr>
           <a:xfrm>
-            <a:off x="685800" y="2770632"/>
-            <a:ext cx="5120640" cy="457200"/>
+            <a:off x="8183879" y="1572768"/>
+            <a:ext cx="3364991" cy="274320"/>
           </a:xfrm>
           <a:prstGeom prst="rect">
             <a:avLst/>
@@ -4206,85 +4485,7 @@
           <a:noFill/>
         </p:spPr>
         <p:txBody>
-          <a:bodyPr wrap="square" lIns="0" rIns="0" tIns="0" bIns="0">
-            <a:spAutoFit/>
-          </a:bodyPr>
-          <a:lstStyle/>
-          <a:p>
-            <a:pPr algn="l">
-              <a:spcAft>
-                <a:spcPts val="100"/>
-              </a:spcAft>
-            </a:pPr>
-            <a:r>
-              <a:rPr sz="1500" b="1">
-                <a:solidFill>
-                  <a:srgbClr val="000091"/>
-                </a:solidFill>
-                <a:latin typeface="Marianne"/>
-              </a:rPr>
-              <a:t>Développeurs · DACCORD</a:t>
-            </a:r>
-          </a:p>
-        </p:txBody>
-      </p:sp>
-      <p:sp>
-        <p:nvSpPr>
-          <p:cNvPr id="9" name="TextBox 8"/>
-          <p:cNvSpPr txBox="1"/>
-          <p:nvPr/>
-        </p:nvSpPr>
-        <p:spPr>
-          <a:xfrm>
-            <a:off x="685800" y="3136392"/>
-            <a:ext cx="5120640" cy="320040"/>
-          </a:xfrm>
-          <a:prstGeom prst="rect">
-            <a:avLst/>
-          </a:prstGeom>
-          <a:noFill/>
-        </p:spPr>
-        <p:txBody>
-          <a:bodyPr wrap="square" lIns="0" rIns="0" tIns="0" bIns="0">
-            <a:spAutoFit/>
-          </a:bodyPr>
-          <a:lstStyle/>
-          <a:p>
-            <a:pPr algn="l">
-              <a:spcAft>
-                <a:spcPts val="600"/>
-              </a:spcAft>
-            </a:pPr>
-            <a:r>
-              <a:rPr sz="1100" b="1">
-                <a:solidFill>
-                  <a:srgbClr val="666666"/>
-                </a:solidFill>
-                <a:latin typeface="Marianne"/>
-              </a:rPr>
-              <a:t>objectif : orchestration de subagents</a:t>
-            </a:r>
-          </a:p>
-        </p:txBody>
-      </p:sp>
-      <p:sp>
-        <p:nvSpPr>
-          <p:cNvPr id="10" name="TextBox 9"/>
-          <p:cNvSpPr txBox="1"/>
-          <p:nvPr/>
-        </p:nvSpPr>
-        <p:spPr>
-          <a:xfrm>
-            <a:off x="685800" y="3502152"/>
-            <a:ext cx="5120640" cy="2350008"/>
-          </a:xfrm>
-          <a:prstGeom prst="rect">
-            <a:avLst/>
-          </a:prstGeom>
-          <a:noFill/>
-        </p:spPr>
-        <p:txBody>
-          <a:bodyPr wrap="square" lIns="0" rIns="0" tIns="0" bIns="0">
+          <a:bodyPr wrap="square">
             <a:spAutoFit/>
           </a:bodyPr>
           <a:lstStyle/>
@@ -4294,78 +4495,162 @@
                 <a:spcPct val="115000"/>
               </a:lnSpc>
               <a:spcAft>
-                <a:spcPts val="500"/>
+                <a:spcPts val="400"/>
               </a:spcAft>
             </a:pPr>
             <a:r>
-              <a:rPr sz="1300" b="0">
-                <a:solidFill>
-                  <a:srgbClr val="2B2B2B"/>
-                </a:solidFill>
-                <a:latin typeface="Marianne"/>
-              </a:rPr>
-              <a:t>Coaching développement augmenté : system prompts, agents, orchestration de subagents.</a:t>
-            </a:r>
-          </a:p>
+              <a:rPr sz="1150" b="1">
+                <a:solidFill>
+                  <a:srgbClr val="000091"/>
+                </a:solidFill>
+                <a:latin typeface="Marianne"/>
+              </a:rPr>
+              <a:t>Chefs de projet · DACCORD &amp; SIRENA</a:t>
+            </a:r>
+          </a:p>
+        </p:txBody>
+      </p:sp>
+      <p:sp>
+        <p:nvSpPr>
+          <p:cNvPr id="15" name="TextBox 14"/>
+          <p:cNvSpPr txBox="1"/>
+          <p:nvPr/>
+        </p:nvSpPr>
+        <p:spPr>
+          <a:xfrm>
+            <a:off x="8183879" y="1828800"/>
+            <a:ext cx="3364991" cy="228600"/>
+          </a:xfrm>
+          <a:prstGeom prst="rect">
+            <a:avLst/>
+          </a:prstGeom>
+          <a:noFill/>
+        </p:spPr>
+        <p:txBody>
+          <a:bodyPr wrap="square">
+            <a:spAutoFit/>
+          </a:bodyPr>
+          <a:lstStyle/>
           <a:p>
             <a:pPr algn="l">
               <a:lnSpc>
                 <a:spcPct val="115000"/>
               </a:lnSpc>
               <a:spcAft>
-                <a:spcPts val="500"/>
+                <a:spcPts val="400"/>
               </a:spcAft>
             </a:pPr>
             <a:r>
-              <a:rPr sz="1300" b="0">
-                <a:solidFill>
-                  <a:srgbClr val="2B2B2B"/>
-                </a:solidFill>
-                <a:latin typeface="Marianne"/>
-              </a:rPr>
-              <a:t>Dès le lundi suivant, l'équipe met ses system prompts en commun d'elle-même.</a:t>
-            </a:r>
-          </a:p>
+              <a:rPr sz="850" b="1">
+                <a:solidFill>
+                  <a:srgbClr val="666666"/>
+                </a:solidFill>
+                <a:latin typeface="Marianne"/>
+              </a:rPr>
+              <a:t>tickets Jira générés sur poste ministère</a:t>
+            </a:r>
+          </a:p>
+        </p:txBody>
+      </p:sp>
+      <p:sp>
+        <p:nvSpPr>
+          <p:cNvPr id="16" name="TextBox 15"/>
+          <p:cNvSpPr txBox="1"/>
+          <p:nvPr/>
+        </p:nvSpPr>
+        <p:spPr>
+          <a:xfrm>
+            <a:off x="8183879" y="2066543"/>
+            <a:ext cx="3364991" cy="1673352"/>
+          </a:xfrm>
+          <a:prstGeom prst="rect">
+            <a:avLst/>
+          </a:prstGeom>
+          <a:noFill/>
+        </p:spPr>
+        <p:txBody>
+          <a:bodyPr wrap="square">
+            <a:spAutoFit/>
+          </a:bodyPr>
+          <a:lstStyle/>
           <a:p>
             <a:pPr algn="l">
               <a:lnSpc>
                 <a:spcPct val="115000"/>
               </a:lnSpc>
               <a:spcAft>
-                <a:spcPts val="500"/>
+                <a:spcPts val="400"/>
               </a:spcAft>
             </a:pPr>
             <a:r>
-              <a:rPr sz="1300" b="0">
+              <a:rPr sz="1000" b="0">
                 <a:solidFill>
                   <a:srgbClr val="2B2B2B"/>
                 </a:solidFill>
                 <a:latin typeface="Marianne"/>
               </a:rPr>
-              <a:t>La PM (Kahina) est aussi accompagnée, sur les tickets de spec.</a:t>
-            </a:r>
-          </a:p>
-        </p:txBody>
-      </p:sp>
-      <p:sp>
-        <p:nvSpPr>
-          <p:cNvPr id="11" name="Rectangle 10"/>
+              <a:t>Formation actée : </a:t>
+            </a:r>
+            <a:r>
+              <a:rPr sz="1000" b="1">
+                <a:solidFill>
+                  <a:srgbClr val="1E1E1E"/>
+                </a:solidFill>
+                <a:latin typeface="Marianne"/>
+              </a:rPr>
+              <a:t>DACCORD le 25 août</a:t>
+            </a:r>
+            <a:r>
+              <a:rPr sz="1000" b="0">
+                <a:solidFill>
+                  <a:srgbClr val="2B2B2B"/>
+                </a:solidFill>
+                <a:latin typeface="Marianne"/>
+              </a:rPr>
+              <a:t> avec Richard et Noura ; Aurélie (SIRENA) </a:t>
+            </a:r>
+            <a:r>
+              <a:rPr sz="1000" b="1">
+                <a:solidFill>
+                  <a:srgbClr val="1E1E1E"/>
+                </a:solidFill>
+                <a:latin typeface="Marianne"/>
+              </a:rPr>
+              <a:t>demande elle-même à être formée</a:t>
+            </a:r>
+            <a:r>
+              <a:rPr sz="1000" b="0">
+                <a:solidFill>
+                  <a:srgbClr val="2B2B2B"/>
+                </a:solidFill>
+                <a:latin typeface="Marianne"/>
+              </a:rPr>
+              <a:t>, créneau à caler. Le ticket arrive formalisé, tests inclus.</a:t>
+            </a:r>
+          </a:p>
+        </p:txBody>
+      </p:sp>
+      <p:sp>
+        <p:nvSpPr>
+          <p:cNvPr id="17" name="Rectangle 16"/>
           <p:cNvSpPr/>
           <p:nvPr/>
         </p:nvSpPr>
         <p:spPr>
           <a:xfrm>
-            <a:off x="6217920" y="2606040"/>
-            <a:ext cx="5486400" cy="3383280"/>
+            <a:off x="548640" y="3968496"/>
+            <a:ext cx="3584448" cy="2331720"/>
           </a:xfrm>
           <a:prstGeom prst="rect">
             <a:avLst/>
           </a:prstGeom>
           <a:solidFill>
-            <a:srgbClr val="FFFFFF"/>
+            <a:srgbClr val="F6F6F6"/>
           </a:solidFill>
-          <a:ln>
-            <a:noFill/>
+          <a:ln w="9525">
+            <a:solidFill>
+              <a:srgbClr val="DDDDDD"/>
+            </a:solidFill>
           </a:ln>
           <a:effectLst/>
         </p:spPr>
@@ -4393,23 +4678,187 @@
       </p:sp>
       <p:sp>
         <p:nvSpPr>
-          <p:cNvPr id="12" name="Rectangle 11"/>
+          <p:cNvPr id="18" name="TextBox 17"/>
+          <p:cNvSpPr txBox="1"/>
+          <p:nvPr/>
+        </p:nvSpPr>
+        <p:spPr>
+          <a:xfrm>
+            <a:off x="658368" y="4059935"/>
+            <a:ext cx="3364991" cy="274320"/>
+          </a:xfrm>
+          <a:prstGeom prst="rect">
+            <a:avLst/>
+          </a:prstGeom>
+          <a:noFill/>
+        </p:spPr>
+        <p:txBody>
+          <a:bodyPr wrap="square">
+            <a:spAutoFit/>
+          </a:bodyPr>
+          <a:lstStyle/>
+          <a:p>
+            <a:pPr algn="l">
+              <a:lnSpc>
+                <a:spcPct val="115000"/>
+              </a:lnSpc>
+              <a:spcAft>
+                <a:spcPts val="400"/>
+              </a:spcAft>
+            </a:pPr>
+            <a:r>
+              <a:rPr sz="1150" b="1">
+                <a:solidFill>
+                  <a:srgbClr val="000091"/>
+                </a:solidFill>
+                <a:latin typeface="Marianne"/>
+              </a:rPr>
+              <a:t>Designers</a:t>
+            </a:r>
+          </a:p>
+        </p:txBody>
+      </p:sp>
+      <p:sp>
+        <p:nvSpPr>
+          <p:cNvPr id="19" name="TextBox 18"/>
+          <p:cNvSpPr txBox="1"/>
+          <p:nvPr/>
+        </p:nvSpPr>
+        <p:spPr>
+          <a:xfrm>
+            <a:off x="658368" y="4315968"/>
+            <a:ext cx="3364991" cy="228600"/>
+          </a:xfrm>
+          <a:prstGeom prst="rect">
+            <a:avLst/>
+          </a:prstGeom>
+          <a:noFill/>
+        </p:spPr>
+        <p:txBody>
+          <a:bodyPr wrap="square">
+            <a:spAutoFit/>
+          </a:bodyPr>
+          <a:lstStyle/>
+          <a:p>
+            <a:pPr algn="l">
+              <a:lnSpc>
+                <a:spcPct val="115000"/>
+              </a:lnSpc>
+              <a:spcAft>
+                <a:spcPts val="400"/>
+              </a:spcAft>
+            </a:pPr>
+            <a:r>
+              <a:rPr sz="850" b="1">
+                <a:solidFill>
+                  <a:srgbClr val="666666"/>
+                </a:solidFill>
+                <a:latin typeface="Marianne"/>
+              </a:rPr>
+              <a:t>de « peu de valeur » au flux complet</a:t>
+            </a:r>
+          </a:p>
+        </p:txBody>
+      </p:sp>
+      <p:sp>
+        <p:nvSpPr>
+          <p:cNvPr id="20" name="TextBox 19"/>
+          <p:cNvSpPr txBox="1"/>
+          <p:nvPr/>
+        </p:nvSpPr>
+        <p:spPr>
+          <a:xfrm>
+            <a:off x="658368" y="4553712"/>
+            <a:ext cx="3364991" cy="1673352"/>
+          </a:xfrm>
+          <a:prstGeom prst="rect">
+            <a:avLst/>
+          </a:prstGeom>
+          <a:noFill/>
+        </p:spPr>
+        <p:txBody>
+          <a:bodyPr wrap="square">
+            <a:spAutoFit/>
+          </a:bodyPr>
+          <a:lstStyle/>
+          <a:p>
+            <a:pPr algn="l">
+              <a:lnSpc>
+                <a:spcPct val="115000"/>
+              </a:lnSpc>
+              <a:spcAft>
+                <a:spcPts val="400"/>
+              </a:spcAft>
+            </a:pPr>
+            <a:r>
+              <a:rPr sz="1000" b="0">
+                <a:solidFill>
+                  <a:srgbClr val="2B2B2B"/>
+                </a:solidFill>
+                <a:latin typeface="Marianne"/>
+              </a:rPr>
+              <a:t>Depuis un poste ministère : </a:t>
+            </a:r>
+            <a:r>
+              <a:rPr sz="1000" b="1">
+                <a:solidFill>
+                  <a:srgbClr val="1E1E1E"/>
+                </a:solidFill>
+                <a:latin typeface="Marianne"/>
+              </a:rPr>
+              <a:t>prototypes DSFR testables</a:t>
+            </a:r>
+            <a:r>
+              <a:rPr sz="1000" b="0">
+                <a:solidFill>
+                  <a:srgbClr val="2B2B2B"/>
+                </a:solidFill>
+                <a:latin typeface="Marianne"/>
+              </a:rPr>
+              <a:t> par des utilisateurs, puis </a:t>
+            </a:r>
+            <a:r>
+              <a:rPr sz="1000" b="1">
+                <a:solidFill>
+                  <a:srgbClr val="1E1E1E"/>
+                </a:solidFill>
+                <a:latin typeface="Marianne"/>
+              </a:rPr>
+              <a:t>maquette Figma générée</a:t>
+            </a:r>
+            <a:r>
+              <a:rPr sz="1000" b="0">
+                <a:solidFill>
+                  <a:srgbClr val="2B2B2B"/>
+                </a:solidFill>
+                <a:latin typeface="Marianne"/>
+              </a:rPr>
+              <a:t> en composants DSFR officiels. Louis valide le use case (13/08).</a:t>
+            </a:r>
+          </a:p>
+        </p:txBody>
+      </p:sp>
+      <p:sp>
+        <p:nvSpPr>
+          <p:cNvPr id="21" name="Rectangle 20"/>
           <p:cNvSpPr/>
           <p:nvPr/>
         </p:nvSpPr>
         <p:spPr>
           <a:xfrm>
-            <a:off x="6217920" y="2606040"/>
-            <a:ext cx="5486400" cy="64008"/>
+            <a:off x="4311396" y="3968496"/>
+            <a:ext cx="3584448" cy="2331720"/>
           </a:xfrm>
           <a:prstGeom prst="rect">
             <a:avLst/>
           </a:prstGeom>
           <a:solidFill>
-            <a:srgbClr val="000091"/>
+            <a:srgbClr val="F6F6F6"/>
           </a:solidFill>
-          <a:ln>
-            <a:noFill/>
+          <a:ln w="9525">
+            <a:solidFill>
+              <a:srgbClr val="DDDDDD"/>
+            </a:solidFill>
           </a:ln>
           <a:effectLst/>
         </p:spPr>
@@ -4437,14 +4886,14 @@
       </p:sp>
       <p:sp>
         <p:nvSpPr>
-          <p:cNvPr id="13" name="TextBox 12"/>
+          <p:cNvPr id="22" name="TextBox 21"/>
           <p:cNvSpPr txBox="1"/>
           <p:nvPr/>
         </p:nvSpPr>
         <p:spPr>
           <a:xfrm>
-            <a:off x="6400800" y="2770632"/>
-            <a:ext cx="5120640" cy="457200"/>
+            <a:off x="4421124" y="4059935"/>
+            <a:ext cx="3364991" cy="274320"/>
           </a:xfrm>
           <a:prstGeom prst="rect">
             <a:avLst/>
@@ -4452,85 +4901,7 @@
           <a:noFill/>
         </p:spPr>
         <p:txBody>
-          <a:bodyPr wrap="square" lIns="0" rIns="0" tIns="0" bIns="0">
-            <a:spAutoFit/>
-          </a:bodyPr>
-          <a:lstStyle/>
-          <a:p>
-            <a:pPr algn="l">
-              <a:spcAft>
-                <a:spcPts val="100"/>
-              </a:spcAft>
-            </a:pPr>
-            <a:r>
-              <a:rPr sz="1500" b="1">
-                <a:solidFill>
-                  <a:srgbClr val="000091"/>
-                </a:solidFill>
-                <a:latin typeface="Marianne"/>
-              </a:rPr>
-              <a:t>Chefs de projet · SIRENA</a:t>
-            </a:r>
-          </a:p>
-        </p:txBody>
-      </p:sp>
-      <p:sp>
-        <p:nvSpPr>
-          <p:cNvPr id="14" name="TextBox 13"/>
-          <p:cNvSpPr txBox="1"/>
-          <p:nvPr/>
-        </p:nvSpPr>
-        <p:spPr>
-          <a:xfrm>
-            <a:off x="6400800" y="3136392"/>
-            <a:ext cx="5120640" cy="320040"/>
-          </a:xfrm>
-          <a:prstGeom prst="rect">
-            <a:avLst/>
-          </a:prstGeom>
-          <a:noFill/>
-        </p:spPr>
-        <p:txBody>
-          <a:bodyPr wrap="square" lIns="0" rIns="0" tIns="0" bIns="0">
-            <a:spAutoFit/>
-          </a:bodyPr>
-          <a:lstStyle/>
-          <a:p>
-            <a:pPr algn="l">
-              <a:spcAft>
-                <a:spcPts val="600"/>
-              </a:spcAft>
-            </a:pPr>
-            <a:r>
-              <a:rPr sz="1100" b="1">
-                <a:solidFill>
-                  <a:srgbClr val="666666"/>
-                </a:solidFill>
-                <a:latin typeface="Marianne"/>
-              </a:rPr>
-              <a:t>Aurélie, PM/PO</a:t>
-            </a:r>
-          </a:p>
-        </p:txBody>
-      </p:sp>
-      <p:sp>
-        <p:nvSpPr>
-          <p:cNvPr id="15" name="TextBox 14"/>
-          <p:cNvSpPr txBox="1"/>
-          <p:nvPr/>
-        </p:nvSpPr>
-        <p:spPr>
-          <a:xfrm>
-            <a:off x="6400800" y="3502152"/>
-            <a:ext cx="5120640" cy="2350008"/>
-          </a:xfrm>
-          <a:prstGeom prst="rect">
-            <a:avLst/>
-          </a:prstGeom>
-          <a:noFill/>
-        </p:spPr>
-        <p:txBody>
-          <a:bodyPr wrap="square" lIns="0" rIns="0" tIns="0" bIns="0">
+          <a:bodyPr wrap="square">
             <a:spAutoFit/>
           </a:bodyPr>
           <a:lstStyle/>
@@ -4540,78 +4911,144 @@
                 <a:spcPct val="115000"/>
               </a:lnSpc>
               <a:spcAft>
-                <a:spcPts val="500"/>
+                <a:spcPts val="400"/>
               </a:spcAft>
             </a:pPr>
             <a:r>
-              <a:rPr sz="1300" b="0">
-                <a:solidFill>
-                  <a:srgbClr val="2B2B2B"/>
-                </a:solidFill>
-                <a:latin typeface="Marianne"/>
-              </a:rPr>
-              <a:t>La cheffe de projet demande elle-même à être formée pour le PM et le PO, au-delà des tickets.</a:t>
-            </a:r>
-          </a:p>
+              <a:rPr sz="1150" b="1">
+                <a:solidFill>
+                  <a:srgbClr val="000091"/>
+                </a:solidFill>
+                <a:latin typeface="Marianne"/>
+              </a:rPr>
+              <a:t>Architectes · Transverse</a:t>
+            </a:r>
+          </a:p>
+        </p:txBody>
+      </p:sp>
+      <p:sp>
+        <p:nvSpPr>
+          <p:cNvPr id="23" name="TextBox 22"/>
+          <p:cNvSpPr txBox="1"/>
+          <p:nvPr/>
+        </p:nvSpPr>
+        <p:spPr>
+          <a:xfrm>
+            <a:off x="4421124" y="4315968"/>
+            <a:ext cx="3364991" cy="228600"/>
+          </a:xfrm>
+          <a:prstGeom prst="rect">
+            <a:avLst/>
+          </a:prstGeom>
+          <a:noFill/>
+        </p:spPr>
+        <p:txBody>
+          <a:bodyPr wrap="square">
+            <a:spAutoFit/>
+          </a:bodyPr>
+          <a:lstStyle/>
           <a:p>
             <a:pPr algn="l">
               <a:lnSpc>
                 <a:spcPct val="115000"/>
               </a:lnSpc>
               <a:spcAft>
-                <a:spcPts val="500"/>
+                <a:spcPts val="400"/>
               </a:spcAft>
             </a:pPr>
             <a:r>
-              <a:rPr sz="1300" b="0">
-                <a:solidFill>
-                  <a:srgbClr val="2B2B2B"/>
-                </a:solidFill>
-                <a:latin typeface="Marianne"/>
-              </a:rPr>
-              <a:t>Session commune avec DACCORD, mi-août.</a:t>
-            </a:r>
-          </a:p>
+              <a:rPr sz="850" b="1">
+                <a:solidFill>
+                  <a:srgbClr val="666666"/>
+                </a:solidFill>
+                <a:latin typeface="Marianne"/>
+              </a:rPr>
+              <a:t>atelier de génération de DA</a:t>
+            </a:r>
+          </a:p>
+        </p:txBody>
+      </p:sp>
+      <p:sp>
+        <p:nvSpPr>
+          <p:cNvPr id="24" name="TextBox 23"/>
+          <p:cNvSpPr txBox="1"/>
+          <p:nvPr/>
+        </p:nvSpPr>
+        <p:spPr>
+          <a:xfrm>
+            <a:off x="4421124" y="4553712"/>
+            <a:ext cx="3364991" cy="1673352"/>
+          </a:xfrm>
+          <a:prstGeom prst="rect">
+            <a:avLst/>
+          </a:prstGeom>
+          <a:noFill/>
+        </p:spPr>
+        <p:txBody>
+          <a:bodyPr wrap="square">
+            <a:spAutoFit/>
+          </a:bodyPr>
+          <a:lstStyle/>
           <a:p>
             <a:pPr algn="l">
               <a:lnSpc>
                 <a:spcPct val="115000"/>
               </a:lnSpc>
               <a:spcAft>
-                <a:spcPts val="500"/>
+                <a:spcPts val="400"/>
               </a:spcAft>
             </a:pPr>
             <a:r>
-              <a:rPr sz="1300" b="0">
+              <a:rPr sz="1000" b="0">
                 <a:solidFill>
                   <a:srgbClr val="2B2B2B"/>
                 </a:solidFill>
                 <a:latin typeface="Marianne"/>
               </a:rPr>
-              <a:t>Une équipe qui accède à ses utilisateurs peut poser les questions auxquelles personne n'avait pensé.</a:t>
-            </a:r>
-          </a:p>
-        </p:txBody>
-      </p:sp>
-      <p:sp>
-        <p:nvSpPr>
-          <p:cNvPr id="16" name="Rectangle 15"/>
+              <a:t>Ils ne connaissaient pas leurs cas d'usage : </a:t>
+            </a:r>
+            <a:r>
+              <a:rPr sz="1000" b="1">
+                <a:solidFill>
+                  <a:srgbClr val="1E1E1E"/>
+                </a:solidFill>
+                <a:latin typeface="Marianne"/>
+              </a:rPr>
+              <a:t>l'atelier en a fait émerger cinq</a:t>
+            </a:r>
+            <a:r>
+              <a:rPr sz="1000" b="0">
+                <a:solidFill>
+                  <a:srgbClr val="2B2B2B"/>
+                </a:solidFill>
+                <a:latin typeface="Marianne"/>
+              </a:rPr>
+              <a:t> (cohérence des choix, schémas, conformité, écarts DA/code). Priorisation d'ici au 21 août.</a:t>
+            </a:r>
+          </a:p>
+        </p:txBody>
+      </p:sp>
+      <p:sp>
+        <p:nvSpPr>
+          <p:cNvPr id="25" name="Rectangle 24"/>
           <p:cNvSpPr/>
           <p:nvPr/>
         </p:nvSpPr>
         <p:spPr>
           <a:xfrm>
-            <a:off x="502920" y="6126480"/>
-            <a:ext cx="5486400" cy="548640"/>
+            <a:off x="8074152" y="3968496"/>
+            <a:ext cx="3584448" cy="2331720"/>
           </a:xfrm>
           <a:prstGeom prst="rect">
             <a:avLst/>
           </a:prstGeom>
           <a:solidFill>
-            <a:srgbClr val="FFFFFF"/>
+            <a:srgbClr val="F6F6F6"/>
           </a:solidFill>
-          <a:ln>
-            <a:noFill/>
+          <a:ln w="9525">
+            <a:solidFill>
+              <a:srgbClr val="DDDDDD"/>
+            </a:solidFill>
           </a:ln>
           <a:effectLst/>
         </p:spPr>
@@ -4639,58 +5076,14 @@
       </p:sp>
       <p:sp>
         <p:nvSpPr>
-          <p:cNvPr id="17" name="Rectangle 16"/>
-          <p:cNvSpPr/>
-          <p:nvPr/>
-        </p:nvSpPr>
-        <p:spPr>
-          <a:xfrm>
-            <a:off x="502920" y="6126480"/>
-            <a:ext cx="5486400" cy="64008"/>
-          </a:xfrm>
-          <a:prstGeom prst="rect">
-            <a:avLst/>
-          </a:prstGeom>
-          <a:solidFill>
-            <a:srgbClr val="000091"/>
-          </a:solidFill>
-          <a:ln>
-            <a:noFill/>
-          </a:ln>
-          <a:effectLst/>
-        </p:spPr>
-        <p:style>
-          <a:lnRef idx="1">
-            <a:schemeClr val="accent1"/>
-          </a:lnRef>
-          <a:fillRef idx="3">
-            <a:schemeClr val="accent1"/>
-          </a:fillRef>
-          <a:effectRef idx="2">
-            <a:schemeClr val="accent1"/>
-          </a:effectRef>
-          <a:fontRef idx="minor">
-            <a:schemeClr val="lt1"/>
-          </a:fontRef>
-        </p:style>
-        <p:txBody>
-          <a:bodyPr rtlCol="0" anchor="ctr"/>
-          <a:lstStyle/>
-          <a:p>
-            <a:pPr algn="ctr"/>
-          </a:p>
-        </p:txBody>
-      </p:sp>
-      <p:sp>
-        <p:nvSpPr>
-          <p:cNvPr id="18" name="TextBox 17"/>
+          <p:cNvPr id="26" name="TextBox 25"/>
           <p:cNvSpPr txBox="1"/>
           <p:nvPr/>
         </p:nvSpPr>
         <p:spPr>
           <a:xfrm>
-            <a:off x="685800" y="6291072"/>
-            <a:ext cx="5120640" cy="457200"/>
+            <a:off x="8183879" y="4059935"/>
+            <a:ext cx="3364991" cy="274320"/>
           </a:xfrm>
           <a:prstGeom prst="rect">
             <a:avLst/>
@@ -4698,46 +5091,7 @@
           <a:noFill/>
         </p:spPr>
         <p:txBody>
-          <a:bodyPr wrap="square" lIns="0" rIns="0" tIns="0" bIns="0">
-            <a:spAutoFit/>
-          </a:bodyPr>
-          <a:lstStyle/>
-          <a:p>
-            <a:pPr algn="l">
-              <a:spcAft>
-                <a:spcPts val="100"/>
-              </a:spcAft>
-            </a:pPr>
-            <a:r>
-              <a:rPr sz="1500" b="1">
-                <a:solidFill>
-                  <a:srgbClr val="000091"/>
-                </a:solidFill>
-                <a:latin typeface="Marianne"/>
-              </a:rPr>
-              <a:t>Architectes · Transverse</a:t>
-            </a:r>
-          </a:p>
-        </p:txBody>
-      </p:sp>
-      <p:sp>
-        <p:nvSpPr>
-          <p:cNvPr id="19" name="TextBox 18"/>
-          <p:cNvSpPr txBox="1"/>
-          <p:nvPr/>
-        </p:nvSpPr>
-        <p:spPr>
-          <a:xfrm>
-            <a:off x="685800" y="6793992"/>
-            <a:ext cx="5120640" cy="-256031"/>
-          </a:xfrm>
-          <a:prstGeom prst="rect">
-            <a:avLst/>
-          </a:prstGeom>
-          <a:noFill/>
-        </p:spPr>
-        <p:txBody>
-          <a:bodyPr wrap="square" lIns="0" rIns="0" tIns="0" bIns="0">
+          <a:bodyPr wrap="square">
             <a:spAutoFit/>
           </a:bodyPr>
           <a:lstStyle/>
@@ -4747,119 +5101,31 @@
                 <a:spcPct val="115000"/>
               </a:lnSpc>
               <a:spcAft>
-                <a:spcPts val="500"/>
+                <a:spcPts val="400"/>
               </a:spcAft>
             </a:pPr>
             <a:r>
-              <a:rPr sz="1300" b="0">
-                <a:solidFill>
-                  <a:srgbClr val="2B2B2B"/>
-                </a:solidFill>
-                <a:latin typeface="Marianne"/>
-              </a:rPr>
-              <a:t>Ils ne connaissaient pas leurs cas d'usage : l'atelier en a fait émerger cinq, qu'ils priorisent.</a:t>
-            </a:r>
-          </a:p>
-        </p:txBody>
-      </p:sp>
-      <p:sp>
-        <p:nvSpPr>
-          <p:cNvPr id="20" name="Rectangle 19"/>
-          <p:cNvSpPr/>
-          <p:nvPr/>
-        </p:nvSpPr>
-        <p:spPr>
-          <a:xfrm>
-            <a:off x="6217920" y="6126480"/>
-            <a:ext cx="5486400" cy="548640"/>
-          </a:xfrm>
-          <a:prstGeom prst="rect">
-            <a:avLst/>
-          </a:prstGeom>
-          <a:solidFill>
-            <a:srgbClr val="FFFFFF"/>
-          </a:solidFill>
-          <a:ln>
-            <a:noFill/>
-          </a:ln>
-          <a:effectLst/>
-        </p:spPr>
-        <p:style>
-          <a:lnRef idx="1">
-            <a:schemeClr val="accent1"/>
-          </a:lnRef>
-          <a:fillRef idx="3">
-            <a:schemeClr val="accent1"/>
-          </a:fillRef>
-          <a:effectRef idx="2">
-            <a:schemeClr val="accent1"/>
-          </a:effectRef>
-          <a:fontRef idx="minor">
-            <a:schemeClr val="lt1"/>
-          </a:fontRef>
-        </p:style>
-        <p:txBody>
-          <a:bodyPr rtlCol="0" anchor="ctr"/>
-          <a:lstStyle/>
-          <a:p>
-            <a:pPr algn="ctr"/>
-          </a:p>
-        </p:txBody>
-      </p:sp>
-      <p:sp>
-        <p:nvSpPr>
-          <p:cNvPr id="21" name="Rectangle 20"/>
-          <p:cNvSpPr/>
-          <p:nvPr/>
-        </p:nvSpPr>
-        <p:spPr>
-          <a:xfrm>
-            <a:off x="6217920" y="6126480"/>
-            <a:ext cx="5486400" cy="64008"/>
-          </a:xfrm>
-          <a:prstGeom prst="rect">
-            <a:avLst/>
-          </a:prstGeom>
-          <a:solidFill>
-            <a:srgbClr val="000091"/>
-          </a:solidFill>
-          <a:ln>
-            <a:noFill/>
-          </a:ln>
-          <a:effectLst/>
-        </p:spPr>
-        <p:style>
-          <a:lnRef idx="1">
-            <a:schemeClr val="accent1"/>
-          </a:lnRef>
-          <a:fillRef idx="3">
-            <a:schemeClr val="accent1"/>
-          </a:fillRef>
-          <a:effectRef idx="2">
-            <a:schemeClr val="accent1"/>
-          </a:effectRef>
-          <a:fontRef idx="minor">
-            <a:schemeClr val="lt1"/>
-          </a:fontRef>
-        </p:style>
-        <p:txBody>
-          <a:bodyPr rtlCol="0" anchor="ctr"/>
-          <a:lstStyle/>
-          <a:p>
-            <a:pPr algn="ctr"/>
-          </a:p>
-        </p:txBody>
-      </p:sp>
-      <p:sp>
-        <p:nvSpPr>
-          <p:cNvPr id="22" name="TextBox 21"/>
+              <a:rPr sz="1150" b="1">
+                <a:solidFill>
+                  <a:srgbClr val="000091"/>
+                </a:solidFill>
+                <a:latin typeface="Marianne"/>
+              </a:rPr>
+              <a:t>PO &amp; Recherche utilisateurs</a:t>
+            </a:r>
+          </a:p>
+        </p:txBody>
+      </p:sp>
+      <p:sp>
+        <p:nvSpPr>
+          <p:cNvPr id="27" name="TextBox 26"/>
           <p:cNvSpPr txBox="1"/>
           <p:nvPr/>
         </p:nvSpPr>
         <p:spPr>
           <a:xfrm>
-            <a:off x="6400800" y="6291072"/>
-            <a:ext cx="5120640" cy="457200"/>
+            <a:off x="8183879" y="4315968"/>
+            <a:ext cx="3364991" cy="228600"/>
           </a:xfrm>
           <a:prstGeom prst="rect">
             <a:avLst/>
@@ -4867,46 +5133,7 @@
           <a:noFill/>
         </p:spPr>
         <p:txBody>
-          <a:bodyPr wrap="square" lIns="0" rIns="0" tIns="0" bIns="0">
-            <a:spAutoFit/>
-          </a:bodyPr>
-          <a:lstStyle/>
-          <a:p>
-            <a:pPr algn="l">
-              <a:spcAft>
-                <a:spcPts val="100"/>
-              </a:spcAft>
-            </a:pPr>
-            <a:r>
-              <a:rPr sz="1500" b="1">
-                <a:solidFill>
-                  <a:srgbClr val="000091"/>
-                </a:solidFill>
-                <a:latin typeface="Marianne"/>
-              </a:rPr>
-              <a:t>PO &amp; Recherche utilisateurs</a:t>
-            </a:r>
-          </a:p>
-        </p:txBody>
-      </p:sp>
-      <p:sp>
-        <p:nvSpPr>
-          <p:cNvPr id="23" name="TextBox 22"/>
-          <p:cNvSpPr txBox="1"/>
-          <p:nvPr/>
-        </p:nvSpPr>
-        <p:spPr>
-          <a:xfrm>
-            <a:off x="6400800" y="6793992"/>
-            <a:ext cx="5120640" cy="-256031"/>
-          </a:xfrm>
-          <a:prstGeom prst="rect">
-            <a:avLst/>
-          </a:prstGeom>
-          <a:noFill/>
-        </p:spPr>
-        <p:txBody>
-          <a:bodyPr wrap="square" lIns="0" rIns="0" tIns="0" bIns="0">
+          <a:bodyPr wrap="square">
             <a:spAutoFit/>
           </a:bodyPr>
           <a:lstStyle/>
@@ -4916,17 +5143,113 @@
                 <a:spcPct val="115000"/>
               </a:lnSpc>
               <a:spcAft>
-                <a:spcPts val="500"/>
+                <a:spcPts val="400"/>
               </a:spcAft>
             </a:pPr>
             <a:r>
-              <a:rPr sz="1300" b="0">
+              <a:rPr sz="850" b="1">
+                <a:solidFill>
+                  <a:srgbClr val="666666"/>
+                </a:solidFill>
+                <a:latin typeface="Marianne"/>
+              </a:rPr>
+              <a:t>RU et PO · en synchronisation</a:t>
+            </a:r>
+          </a:p>
+        </p:txBody>
+      </p:sp>
+      <p:sp>
+        <p:nvSpPr>
+          <p:cNvPr id="28" name="TextBox 27"/>
+          <p:cNvSpPr txBox="1"/>
+          <p:nvPr/>
+        </p:nvSpPr>
+        <p:spPr>
+          <a:xfrm>
+            <a:off x="8183879" y="4553712"/>
+            <a:ext cx="3364991" cy="1673352"/>
+          </a:xfrm>
+          <a:prstGeom prst="rect">
+            <a:avLst/>
+          </a:prstGeom>
+          <a:noFill/>
+        </p:spPr>
+        <p:txBody>
+          <a:bodyPr wrap="square">
+            <a:spAutoFit/>
+          </a:bodyPr>
+          <a:lstStyle/>
+          <a:p>
+            <a:pPr algn="l">
+              <a:lnSpc>
+                <a:spcPct val="115000"/>
+              </a:lnSpc>
+              <a:spcAft>
+                <a:spcPts val="400"/>
+              </a:spcAft>
+            </a:pPr>
+            <a:r>
+              <a:rPr sz="1000" b="0">
                 <a:solidFill>
                   <a:srgbClr val="2B2B2B"/>
                 </a:solidFill>
                 <a:latin typeface="Marianne"/>
               </a:rPr>
-              <a:t>Sync avec Olivier Toumsy ; Felix revient avec une map des use cases RU et PO.</a:t>
+              <a:t>Synchronisation avec </a:t>
+            </a:r>
+            <a:r>
+              <a:rPr sz="1000" b="1">
+                <a:solidFill>
+                  <a:srgbClr val="1E1E1E"/>
+                </a:solidFill>
+                <a:latin typeface="Marianne"/>
+              </a:rPr>
+              <a:t>Olivier Toumsy</a:t>
+            </a:r>
+            <a:r>
+              <a:rPr sz="1000" b="0">
+                <a:solidFill>
+                  <a:srgbClr val="2B2B2B"/>
+                </a:solidFill>
+                <a:latin typeface="Marianne"/>
+              </a:rPr>
+              <a:t> ; </a:t>
+            </a:r>
+            <a:r>
+              <a:rPr sz="1000" b="1">
+                <a:solidFill>
+                  <a:srgbClr val="1E1E1E"/>
+                </a:solidFill>
+                <a:latin typeface="Marianne"/>
+              </a:rPr>
+              <a:t>Felix</a:t>
+            </a:r>
+            <a:r>
+              <a:rPr sz="1000" b="0">
+                <a:solidFill>
+                  <a:srgbClr val="2B2B2B"/>
+                </a:solidFill>
+                <a:latin typeface="Marianne"/>
+              </a:rPr>
+              <a:t> revient avec une </a:t>
+            </a:r>
+            <a:r>
+              <a:rPr sz="1000" b="1">
+                <a:solidFill>
+                  <a:srgbClr val="1E1E1E"/>
+                </a:solidFill>
+                <a:latin typeface="Marianne"/>
+              </a:rPr>
+              <a:t>map des use cases RU et PO</a:t>
+            </a:r>
+            <a:r>
+              <a:rPr sz="1000" b="0">
+                <a:solidFill>
+                  <a:srgbClr val="2B2B2B"/>
+                </a:solidFill>
+                <a:latin typeface="Marianne"/>
+              </a:rPr>
+              <a:t>. L'accompagnement tickets s'étend à VAO (Halim) et BIO2 (Yuna).</a:t>
             </a:r>
           </a:p>
         </p:txBody>
@@ -4951,23 +5274,160 @@
       <p:grpSpPr/>
       <p:sp>
         <p:nvSpPr>
-          <p:cNvPr id="2" name="Rectangle 1"/>
+          <p:cNvPr id="2" name="TextBox 1"/>
+          <p:cNvSpPr txBox="1"/>
+          <p:nvPr/>
+        </p:nvSpPr>
+        <p:spPr>
+          <a:xfrm>
+            <a:off x="548640" y="292608"/>
+            <a:ext cx="10058400" cy="228600"/>
+          </a:xfrm>
+          <a:prstGeom prst="rect">
+            <a:avLst/>
+          </a:prstGeom>
+          <a:noFill/>
+        </p:spPr>
+        <p:txBody>
+          <a:bodyPr wrap="square">
+            <a:spAutoFit/>
+          </a:bodyPr>
+          <a:lstStyle/>
+          <a:p>
+            <a:pPr algn="l">
+              <a:lnSpc>
+                <a:spcPct val="115000"/>
+              </a:lnSpc>
+              <a:spcAft>
+                <a:spcPts val="400"/>
+              </a:spcAft>
+            </a:pPr>
+            <a:r>
+              <a:rPr sz="950" b="1">
+                <a:solidFill>
+                  <a:srgbClr val="000091"/>
+                </a:solidFill>
+                <a:latin typeface="Marianne"/>
+              </a:rPr>
+              <a:t>LES FONDATIONS · POUR PASSER À L'ÉCHELLE</a:t>
+            </a:r>
+          </a:p>
+        </p:txBody>
+      </p:sp>
+      <p:sp>
+        <p:nvSpPr>
+          <p:cNvPr id="3" name="TextBox 2"/>
+          <p:cNvSpPr txBox="1"/>
+          <p:nvPr/>
+        </p:nvSpPr>
+        <p:spPr>
+          <a:xfrm>
+            <a:off x="548640" y="530352"/>
+            <a:ext cx="11064240" cy="685800"/>
+          </a:xfrm>
+          <a:prstGeom prst="rect">
+            <a:avLst/>
+          </a:prstGeom>
+          <a:noFill/>
+        </p:spPr>
+        <p:txBody>
+          <a:bodyPr wrap="square">
+            <a:spAutoFit/>
+          </a:bodyPr>
+          <a:lstStyle/>
+          <a:p>
+            <a:pPr algn="l">
+              <a:lnSpc>
+                <a:spcPct val="115000"/>
+              </a:lnSpc>
+              <a:spcAft>
+                <a:spcPts val="400"/>
+              </a:spcAft>
+            </a:pPr>
+            <a:r>
+              <a:rPr sz="2600" b="1">
+                <a:solidFill>
+                  <a:srgbClr val="000091"/>
+                </a:solidFill>
+                <a:latin typeface="Marianne"/>
+              </a:rPr>
+              <a:t>On lève les freins :</a:t>
+            </a:r>
+            <a:r>
+              <a:rPr sz="2600" b="0">
+                <a:solidFill>
+                  <a:srgbClr val="666666"/>
+                </a:solidFill>
+                <a:latin typeface="Marianne"/>
+              </a:rPr>
+              <a:t> poste de travail, fournisseurs, bench.</a:t>
+            </a:r>
+          </a:p>
+        </p:txBody>
+      </p:sp>
+      <p:sp>
+        <p:nvSpPr>
+          <p:cNvPr id="4" name="TextBox 3"/>
+          <p:cNvSpPr txBox="1"/>
+          <p:nvPr/>
+        </p:nvSpPr>
+        <p:spPr>
+          <a:xfrm>
+            <a:off x="10881360" y="292608"/>
+            <a:ext cx="822960" cy="228600"/>
+          </a:xfrm>
+          <a:prstGeom prst="rect">
+            <a:avLst/>
+          </a:prstGeom>
+          <a:noFill/>
+        </p:spPr>
+        <p:txBody>
+          <a:bodyPr wrap="square">
+            <a:spAutoFit/>
+          </a:bodyPr>
+          <a:lstStyle/>
+          <a:p>
+            <a:pPr algn="r">
+              <a:lnSpc>
+                <a:spcPct val="115000"/>
+              </a:lnSpc>
+              <a:spcAft>
+                <a:spcPts val="400"/>
+              </a:spcAft>
+            </a:pPr>
+            <a:r>
+              <a:rPr sz="950" b="1">
+                <a:solidFill>
+                  <a:srgbClr val="7F7FC8"/>
+                </a:solidFill>
+                <a:latin typeface="Marianne"/>
+              </a:rPr>
+              <a:t>3 / 3</a:t>
+            </a:r>
+          </a:p>
+        </p:txBody>
+      </p:sp>
+      <p:sp>
+        <p:nvSpPr>
+          <p:cNvPr id="5" name="Rectangle 4"/>
           <p:cNvSpPr/>
           <p:nvPr/>
         </p:nvSpPr>
         <p:spPr>
           <a:xfrm>
-            <a:off x="502920" y="502920"/>
-            <a:ext cx="11201400" cy="41148"/>
+            <a:off x="548640" y="1481328"/>
+            <a:ext cx="3584448" cy="2834640"/>
           </a:xfrm>
           <a:prstGeom prst="rect">
             <a:avLst/>
           </a:prstGeom>
           <a:solidFill>
-            <a:srgbClr val="000091"/>
+            <a:srgbClr val="F6F6F6"/>
           </a:solidFill>
-          <a:ln>
-            <a:noFill/>
+          <a:ln w="9525">
+            <a:solidFill>
+              <a:srgbClr val="DDDDDD"/>
+            </a:solidFill>
           </a:ln>
           <a:effectLst/>
         </p:spPr>
@@ -4995,14 +5455,14 @@
       </p:sp>
       <p:sp>
         <p:nvSpPr>
-          <p:cNvPr id="3" name="TextBox 2"/>
+          <p:cNvPr id="6" name="TextBox 5"/>
           <p:cNvSpPr txBox="1"/>
           <p:nvPr/>
         </p:nvSpPr>
         <p:spPr>
           <a:xfrm>
-            <a:off x="502920" y="731520"/>
-            <a:ext cx="10058400" cy="365760"/>
+            <a:off x="658368" y="1572768"/>
+            <a:ext cx="3364991" cy="274320"/>
           </a:xfrm>
           <a:prstGeom prst="rect">
             <a:avLst/>
@@ -5010,38 +5470,41 @@
           <a:noFill/>
         </p:spPr>
         <p:txBody>
-          <a:bodyPr wrap="square" lIns="0" rIns="0" tIns="0" bIns="0">
+          <a:bodyPr wrap="square">
             <a:spAutoFit/>
           </a:bodyPr>
           <a:lstStyle/>
           <a:p>
             <a:pPr algn="l">
+              <a:lnSpc>
+                <a:spcPct val="115000"/>
+              </a:lnSpc>
               <a:spcAft>
-                <a:spcPts val="600"/>
+                <a:spcPts val="400"/>
               </a:spcAft>
             </a:pPr>
             <a:r>
-              <a:rPr sz="1300" b="1">
-                <a:solidFill>
-                  <a:srgbClr val="7F7FC8"/>
-                </a:solidFill>
-                <a:latin typeface="Marianne"/>
-              </a:rPr>
-              <a:t>LES FONDATIONS · POUR PASSER À L'ÉCHELLE</a:t>
-            </a:r>
-          </a:p>
-        </p:txBody>
-      </p:sp>
-      <p:sp>
-        <p:nvSpPr>
-          <p:cNvPr id="4" name="TextBox 3"/>
+              <a:rPr sz="1150" b="1">
+                <a:solidFill>
+                  <a:srgbClr val="000091"/>
+                </a:solidFill>
+                <a:latin typeface="Marianne"/>
+              </a:rPr>
+              <a:t>Poste de travail : deux voies passent</a:t>
+            </a:r>
+          </a:p>
+        </p:txBody>
+      </p:sp>
+      <p:sp>
+        <p:nvSpPr>
+          <p:cNvPr id="7" name="TextBox 6"/>
           <p:cNvSpPr txBox="1"/>
           <p:nvPr/>
         </p:nvSpPr>
         <p:spPr>
           <a:xfrm>
-            <a:off x="10424160" y="658368"/>
-            <a:ext cx="1280160" cy="365760"/>
+            <a:off x="658368" y="1828800"/>
+            <a:ext cx="3364991" cy="2414016"/>
           </a:xfrm>
           <a:prstGeom prst="rect">
             <a:avLst/>
@@ -5049,38 +5512,86 @@
           <a:noFill/>
         </p:spPr>
         <p:txBody>
-          <a:bodyPr wrap="square" lIns="0" rIns="0" tIns="0" bIns="0">
+          <a:bodyPr wrap="square">
             <a:spAutoFit/>
           </a:bodyPr>
           <a:lstStyle/>
           <a:p>
-            <a:pPr algn="r">
+            <a:pPr algn="l">
+              <a:lnSpc>
+                <a:spcPct val="115000"/>
+              </a:lnSpc>
               <a:spcAft>
-                <a:spcPts val="600"/>
+                <a:spcPts val="400"/>
               </a:spcAft>
             </a:pPr>
             <a:r>
-              <a:rPr sz="1200" b="1">
-                <a:solidFill>
-                  <a:srgbClr val="7F7FC8"/>
-                </a:solidFill>
-                <a:latin typeface="Marianne"/>
-              </a:rPr>
-              <a:t>3 / 3</a:t>
-            </a:r>
-          </a:p>
-        </p:txBody>
-      </p:sp>
-      <p:sp>
-        <p:nvSpPr>
-          <p:cNvPr id="5" name="TextBox 4"/>
+              <a:rPr sz="1050" b="1">
+                <a:solidFill>
+                  <a:srgbClr val="1E1E1E"/>
+                </a:solidFill>
+                <a:latin typeface="Marianne"/>
+              </a:rPr>
+              <a:t>OpenCode Desktop</a:t>
+            </a:r>
+            <a:r>
+              <a:rPr sz="1050" b="0">
+                <a:solidFill>
+                  <a:srgbClr val="2B2B2B"/>
+                </a:solidFill>
+                <a:latin typeface="Marianne"/>
+              </a:rPr>
+              <a:t> (sans droits admin, clé Albert) et </a:t>
+            </a:r>
+            <a:r>
+              <a:rPr sz="1050" b="1">
+                <a:solidFill>
+                  <a:srgbClr val="1E1E1E"/>
+                </a:solidFill>
+                <a:latin typeface="Marianne"/>
+              </a:rPr>
+              <a:t>Claude Code dans VS Code</a:t>
+            </a:r>
+            <a:r>
+              <a:rPr sz="1050" b="0">
+                <a:solidFill>
+                  <a:srgbClr val="2B2B2B"/>
+                </a:solidFill>
+                <a:latin typeface="Marianne"/>
+              </a:rPr>
+              <a:t> (clé Bedrock) fonctionnent sur PC ministère ; la matrice « qui peut utiliser quoi » est </a:t>
+            </a:r>
+            <a:r>
+              <a:rPr sz="1050" b="1">
+                <a:solidFill>
+                  <a:srgbClr val="1E1E1E"/>
+                </a:solidFill>
+                <a:latin typeface="Marianne"/>
+              </a:rPr>
+              <a:t>livrée</a:t>
+            </a:r>
+            <a:r>
+              <a:rPr sz="1050" b="0">
+                <a:solidFill>
+                  <a:srgbClr val="2B2B2B"/>
+                </a:solidFill>
+                <a:latin typeface="Marianne"/>
+              </a:rPr>
+              <a:t>.</a:t>
+            </a:r>
+          </a:p>
+        </p:txBody>
+      </p:sp>
+      <p:sp>
+        <p:nvSpPr>
+          <p:cNvPr id="8" name="TextBox 7"/>
           <p:cNvSpPr txBox="1"/>
           <p:nvPr/>
         </p:nvSpPr>
         <p:spPr>
           <a:xfrm>
-            <a:off x="502920" y="1097280"/>
-            <a:ext cx="11201400" cy="1143000"/>
+            <a:off x="658368" y="2569464"/>
+            <a:ext cx="3364991" cy="1673352"/>
           </a:xfrm>
           <a:prstGeom prst="rect">
             <a:avLst/>
@@ -5088,50 +5599,52 @@
           <a:noFill/>
         </p:spPr>
         <p:txBody>
-          <a:bodyPr wrap="square" lIns="0" rIns="0" tIns="0" bIns="0">
+          <a:bodyPr wrap="square">
             <a:spAutoFit/>
           </a:bodyPr>
           <a:lstStyle/>
           <a:p>
             <a:pPr algn="l">
               <a:lnSpc>
-                <a:spcPct val="105000"/>
+                <a:spcPct val="115000"/>
               </a:lnSpc>
               <a:spcAft>
-                <a:spcPts val="600"/>
+                <a:spcPts val="400"/>
               </a:spcAft>
             </a:pPr>
             <a:r>
-              <a:rPr sz="3200" b="1">
-                <a:solidFill>
-                  <a:srgbClr val="000091"/>
-                </a:solidFill>
-                <a:latin typeface="Marianne"/>
-              </a:rPr>
-              <a:t>On lève les freins : outillage interne, Bedrock, souveraineté.</a:t>
-            </a:r>
-          </a:p>
-        </p:txBody>
-      </p:sp>
-      <p:sp>
-        <p:nvSpPr>
-          <p:cNvPr id="6" name="Rectangle 5"/>
+              <a:rPr sz="1050" b="1">
+                <a:solidFill>
+                  <a:srgbClr val="7F7FC8"/>
+                </a:solidFill>
+                <a:latin typeface="Marianne"/>
+              </a:rPr>
+              <a:t>→ l'enjeu devient la liberté du choix du harness (centre logiciel, introduction par Olivier)</a:t>
+            </a:r>
+          </a:p>
+        </p:txBody>
+      </p:sp>
+      <p:sp>
+        <p:nvSpPr>
+          <p:cNvPr id="9" name="Rectangle 8"/>
           <p:cNvSpPr/>
           <p:nvPr/>
         </p:nvSpPr>
         <p:spPr>
           <a:xfrm>
-            <a:off x="502920" y="2651760"/>
-            <a:ext cx="3611880" cy="2377440"/>
+            <a:off x="4311396" y="1481328"/>
+            <a:ext cx="3584448" cy="2834640"/>
           </a:xfrm>
           <a:prstGeom prst="rect">
             <a:avLst/>
           </a:prstGeom>
           <a:solidFill>
-            <a:srgbClr val="FFFFFF"/>
+            <a:srgbClr val="F6F6F6"/>
           </a:solidFill>
-          <a:ln>
-            <a:noFill/>
+          <a:ln w="9525">
+            <a:solidFill>
+              <a:srgbClr val="DDDDDD"/>
+            </a:solidFill>
           </a:ln>
           <a:effectLst/>
         </p:spPr>
@@ -5159,23 +5672,196 @@
       </p:sp>
       <p:sp>
         <p:nvSpPr>
-          <p:cNvPr id="7" name="Rectangle 6"/>
+          <p:cNvPr id="10" name="TextBox 9"/>
+          <p:cNvSpPr txBox="1"/>
+          <p:nvPr/>
+        </p:nvSpPr>
+        <p:spPr>
+          <a:xfrm>
+            <a:off x="4421124" y="1572768"/>
+            <a:ext cx="3364991" cy="274320"/>
+          </a:xfrm>
+          <a:prstGeom prst="rect">
+            <a:avLst/>
+          </a:prstGeom>
+          <a:noFill/>
+        </p:spPr>
+        <p:txBody>
+          <a:bodyPr wrap="square">
+            <a:spAutoFit/>
+          </a:bodyPr>
+          <a:lstStyle/>
+          <a:p>
+            <a:pPr algn="l">
+              <a:lnSpc>
+                <a:spcPct val="115000"/>
+              </a:lnSpc>
+              <a:spcAft>
+                <a:spcPts val="400"/>
+              </a:spcAft>
+            </a:pPr>
+            <a:r>
+              <a:rPr sz="1150" b="1">
+                <a:solidFill>
+                  <a:srgbClr val="000091"/>
+                </a:solidFill>
+                <a:latin typeface="Marianne"/>
+              </a:rPr>
+              <a:t>Fournisseurs : ouvrir le choix</a:t>
+            </a:r>
+          </a:p>
+        </p:txBody>
+      </p:sp>
+      <p:sp>
+        <p:nvSpPr>
+          <p:cNvPr id="11" name="TextBox 10"/>
+          <p:cNvSpPr txBox="1"/>
+          <p:nvPr/>
+        </p:nvSpPr>
+        <p:spPr>
+          <a:xfrm>
+            <a:off x="4421124" y="1828800"/>
+            <a:ext cx="3364991" cy="2414016"/>
+          </a:xfrm>
+          <a:prstGeom prst="rect">
+            <a:avLst/>
+          </a:prstGeom>
+          <a:noFill/>
+        </p:spPr>
+        <p:txBody>
+          <a:bodyPr wrap="square">
+            <a:spAutoFit/>
+          </a:bodyPr>
+          <a:lstStyle/>
+          <a:p>
+            <a:pPr algn="l">
+              <a:lnSpc>
+                <a:spcPct val="115000"/>
+              </a:lnSpc>
+              <a:spcAft>
+                <a:spcPts val="400"/>
+              </a:spcAft>
+            </a:pPr>
+            <a:r>
+              <a:rPr sz="1050" b="1">
+                <a:solidFill>
+                  <a:srgbClr val="1E1E1E"/>
+                </a:solidFill>
+                <a:latin typeface="Marianne"/>
+              </a:rPr>
+              <a:t>Bedrock exploré avec AWS</a:t>
+            </a:r>
+            <a:r>
+              <a:rPr sz="1050" b="0">
+                <a:solidFill>
+                  <a:srgbClr val="2B2B2B"/>
+                </a:solidFill>
+                <a:latin typeface="Marianne"/>
+              </a:rPr>
+              <a:t> : viable (Claude Code adossé à l'observabilité), mais le harness est imposé et gourmand en contexte. </a:t>
+            </a:r>
+            <a:r>
+              <a:rPr sz="1050" b="1">
+                <a:solidFill>
+                  <a:srgbClr val="1E1E1E"/>
+                </a:solidFill>
+                <a:latin typeface="Marianne"/>
+              </a:rPr>
+              <a:t>Scaleway</a:t>
+            </a:r>
+            <a:r>
+              <a:rPr sz="1050" b="0">
+                <a:solidFill>
+                  <a:srgbClr val="2B2B2B"/>
+                </a:solidFill>
+                <a:latin typeface="Marianne"/>
+              </a:rPr>
+              <a:t> (open-weight, souveraineté) et </a:t>
+            </a:r>
+            <a:r>
+              <a:rPr sz="1050" b="1">
+                <a:solidFill>
+                  <a:srgbClr val="1E1E1E"/>
+                </a:solidFill>
+                <a:latin typeface="Marianne"/>
+              </a:rPr>
+              <a:t>Google Vertex AI</a:t>
+            </a:r>
+            <a:r>
+              <a:rPr sz="1050" b="0">
+                <a:solidFill>
+                  <a:srgbClr val="2B2B2B"/>
+                </a:solidFill>
+                <a:latin typeface="Marianne"/>
+              </a:rPr>
+              <a:t> à explorer.</a:t>
+            </a:r>
+          </a:p>
+        </p:txBody>
+      </p:sp>
+      <p:sp>
+        <p:nvSpPr>
+          <p:cNvPr id="12" name="TextBox 11"/>
+          <p:cNvSpPr txBox="1"/>
+          <p:nvPr/>
+        </p:nvSpPr>
+        <p:spPr>
+          <a:xfrm>
+            <a:off x="4421124" y="2569464"/>
+            <a:ext cx="3364991" cy="1673352"/>
+          </a:xfrm>
+          <a:prstGeom prst="rect">
+            <a:avLst/>
+          </a:prstGeom>
+          <a:noFill/>
+        </p:spPr>
+        <p:txBody>
+          <a:bodyPr wrap="square">
+            <a:spAutoFit/>
+          </a:bodyPr>
+          <a:lstStyle/>
+          <a:p>
+            <a:pPr algn="l">
+              <a:lnSpc>
+                <a:spcPct val="115000"/>
+              </a:lnSpc>
+              <a:spcAft>
+                <a:spcPts val="400"/>
+              </a:spcAft>
+            </a:pPr>
+            <a:r>
+              <a:rPr sz="1050" b="1">
+                <a:solidFill>
+                  <a:srgbClr val="7F7FC8"/>
+                </a:solidFill>
+                <a:latin typeface="Marianne"/>
+              </a:rPr>
+              <a:t>→ viser une observabilité indépendante du harness</a:t>
+            </a:r>
+          </a:p>
+        </p:txBody>
+      </p:sp>
+      <p:sp>
+        <p:nvSpPr>
+          <p:cNvPr id="13" name="Rectangle 12"/>
           <p:cNvSpPr/>
           <p:nvPr/>
         </p:nvSpPr>
         <p:spPr>
           <a:xfrm>
-            <a:off x="502920" y="2651760"/>
-            <a:ext cx="3611880" cy="64008"/>
+            <a:off x="8074152" y="1481328"/>
+            <a:ext cx="3584448" cy="2834640"/>
           </a:xfrm>
           <a:prstGeom prst="rect">
             <a:avLst/>
           </a:prstGeom>
           <a:solidFill>
-            <a:srgbClr val="000091"/>
+            <a:srgbClr val="F6F6F6"/>
           </a:solidFill>
-          <a:ln>
-            <a:noFill/>
+          <a:ln w="9525">
+            <a:solidFill>
+              <a:srgbClr val="DDDDDD"/>
+            </a:solidFill>
           </a:ln>
           <a:effectLst/>
         </p:spPr>
@@ -5203,14 +5889,14 @@
       </p:sp>
       <p:sp>
         <p:nvSpPr>
-          <p:cNvPr id="8" name="TextBox 7"/>
+          <p:cNvPr id="14" name="TextBox 13"/>
           <p:cNvSpPr txBox="1"/>
           <p:nvPr/>
         </p:nvSpPr>
         <p:spPr>
           <a:xfrm>
-            <a:off x="685800" y="2816352"/>
-            <a:ext cx="3246120" cy="457200"/>
+            <a:off x="8183879" y="1572768"/>
+            <a:ext cx="3364991" cy="274320"/>
           </a:xfrm>
           <a:prstGeom prst="rect">
             <a:avLst/>
@@ -5218,46 +5904,7 @@
           <a:noFill/>
         </p:spPr>
         <p:txBody>
-          <a:bodyPr wrap="square" lIns="0" rIns="0" tIns="0" bIns="0">
-            <a:spAutoFit/>
-          </a:bodyPr>
-          <a:lstStyle/>
-          <a:p>
-            <a:pPr algn="l">
-              <a:spcAft>
-                <a:spcPts val="100"/>
-              </a:spcAft>
-            </a:pPr>
-            <a:r>
-              <a:rPr sz="1500" b="1">
-                <a:solidFill>
-                  <a:srgbClr val="000091"/>
-                </a:solidFill>
-                <a:latin typeface="Marianne"/>
-              </a:rPr>
-              <a:t>Outillage des postes internes</a:t>
-            </a:r>
-          </a:p>
-        </p:txBody>
-      </p:sp>
-      <p:sp>
-        <p:nvSpPr>
-          <p:cNvPr id="9" name="TextBox 8"/>
-          <p:cNvSpPr txBox="1"/>
-          <p:nvPr/>
-        </p:nvSpPr>
-        <p:spPr>
-          <a:xfrm>
-            <a:off x="685800" y="3319272"/>
-            <a:ext cx="3246120" cy="1572768"/>
-          </a:xfrm>
-          <a:prstGeom prst="rect">
-            <a:avLst/>
-          </a:prstGeom>
-          <a:noFill/>
-        </p:spPr>
-        <p:txBody>
-          <a:bodyPr wrap="square" lIns="0" rIns="0" tIns="0" bIns="0">
+          <a:bodyPr wrap="square">
             <a:spAutoFit/>
           </a:bodyPr>
           <a:lstStyle/>
@@ -5267,56 +5914,139 @@
                 <a:spcPct val="115000"/>
               </a:lnSpc>
               <a:spcAft>
-                <a:spcPts val="500"/>
+                <a:spcPts val="400"/>
               </a:spcAft>
             </a:pPr>
             <a:r>
-              <a:rPr sz="1300" b="0">
-                <a:solidFill>
-                  <a:srgbClr val="2B2B2B"/>
-                </a:solidFill>
-                <a:latin typeface="Marianne"/>
-              </a:rPr>
-              <a:t>Le point dur trouve sa piste : packaging par le centre logiciel (Céline Liechti) ou compte admin temporaire.</a:t>
-            </a:r>
-          </a:p>
+              <a:rPr sz="1150" b="1">
+                <a:solidFill>
+                  <a:srgbClr val="000091"/>
+                </a:solidFill>
+                <a:latin typeface="Marianne"/>
+              </a:rPr>
+              <a:t>Bench : décider sur des faits</a:t>
+            </a:r>
+          </a:p>
+        </p:txBody>
+      </p:sp>
+      <p:sp>
+        <p:nvSpPr>
+          <p:cNvPr id="15" name="TextBox 14"/>
+          <p:cNvSpPr txBox="1"/>
+          <p:nvPr/>
+        </p:nvSpPr>
+        <p:spPr>
+          <a:xfrm>
+            <a:off x="8183879" y="1828800"/>
+            <a:ext cx="3364991" cy="2414016"/>
+          </a:xfrm>
+          <a:prstGeom prst="rect">
+            <a:avLst/>
+          </a:prstGeom>
+          <a:noFill/>
+        </p:spPr>
+        <p:txBody>
+          <a:bodyPr wrap="square">
+            <a:spAutoFit/>
+          </a:bodyPr>
+          <a:lstStyle/>
           <a:p>
             <a:pPr algn="l">
               <a:lnSpc>
                 <a:spcPct val="115000"/>
               </a:lnSpc>
               <a:spcAft>
-                <a:spcPts val="500"/>
+                <a:spcPts val="400"/>
               </a:spcAft>
             </a:pPr>
             <a:r>
-              <a:rPr sz="1300" b="0">
+              <a:rPr sz="1050" b="0">
                 <a:solidFill>
                   <a:srgbClr val="2B2B2B"/>
                 </a:solidFill>
                 <a:latin typeface="Marianne"/>
               </a:rPr>
-              <a:t>L'adoption s'ouvre aux postes internes.</a:t>
-            </a:r>
-          </a:p>
-        </p:txBody>
-      </p:sp>
-      <p:sp>
-        <p:nvSpPr>
-          <p:cNvPr id="10" name="Rectangle 9"/>
+              <a:t>Une </a:t>
+            </a:r>
+            <a:r>
+              <a:rPr sz="1050" b="1">
+                <a:solidFill>
+                  <a:srgbClr val="1E1E1E"/>
+                </a:solidFill>
+                <a:latin typeface="Marianne"/>
+              </a:rPr>
+              <a:t>matrice performance / prix / souveraineté / conformité</a:t>
+            </a:r>
+            <a:r>
+              <a:rPr sz="1050" b="0">
+                <a:solidFill>
+                  <a:srgbClr val="2B2B2B"/>
+                </a:solidFill>
+                <a:latin typeface="Marianne"/>
+              </a:rPr>
+              <a:t> a été bâtie (7 stacks), élargie aux modèles Bedrock en août ; la stack interne (et externes sur sujets confidentiels) se tranchera ensuite.</a:t>
+            </a:r>
+          </a:p>
+        </p:txBody>
+      </p:sp>
+      <p:sp>
+        <p:nvSpPr>
+          <p:cNvPr id="16" name="TextBox 15"/>
+          <p:cNvSpPr txBox="1"/>
+          <p:nvPr/>
+        </p:nvSpPr>
+        <p:spPr>
+          <a:xfrm>
+            <a:off x="8183879" y="2569464"/>
+            <a:ext cx="3364991" cy="1673352"/>
+          </a:xfrm>
+          <a:prstGeom prst="rect">
+            <a:avLst/>
+          </a:prstGeom>
+          <a:noFill/>
+        </p:spPr>
+        <p:txBody>
+          <a:bodyPr wrap="square">
+            <a:spAutoFit/>
+          </a:bodyPr>
+          <a:lstStyle/>
+          <a:p>
+            <a:pPr algn="l">
+              <a:lnSpc>
+                <a:spcPct val="115000"/>
+              </a:lnSpc>
+              <a:spcAft>
+                <a:spcPts val="400"/>
+              </a:spcAft>
+            </a:pPr>
+            <a:r>
+              <a:rPr sz="1050" b="1">
+                <a:solidFill>
+                  <a:srgbClr val="7F7FC8"/>
+                </a:solidFill>
+                <a:latin typeface="Marianne"/>
+              </a:rPr>
+              <a:t>→ un choix documenté, pas un pari</a:t>
+            </a:r>
+          </a:p>
+        </p:txBody>
+      </p:sp>
+      <p:sp>
+        <p:nvSpPr>
+          <p:cNvPr id="17" name="Rectangle 16"/>
           <p:cNvSpPr/>
           <p:nvPr/>
         </p:nvSpPr>
         <p:spPr>
           <a:xfrm>
-            <a:off x="4297680" y="2651760"/>
-            <a:ext cx="3611880" cy="2377440"/>
+            <a:off x="548640" y="4617720"/>
+            <a:ext cx="11109960" cy="1051560"/>
           </a:xfrm>
           <a:prstGeom prst="rect">
             <a:avLst/>
           </a:prstGeom>
           <a:solidFill>
-            <a:srgbClr val="FFFFFF"/>
+            <a:srgbClr val="DAF5E7"/>
           </a:solidFill>
           <a:ln>
             <a:noFill/>
@@ -5347,20 +6077,20 @@
       </p:sp>
       <p:sp>
         <p:nvSpPr>
-          <p:cNvPr id="11" name="Rectangle 10"/>
+          <p:cNvPr id="18" name="Rectangle 17"/>
           <p:cNvSpPr/>
           <p:nvPr/>
         </p:nvSpPr>
         <p:spPr>
           <a:xfrm>
-            <a:off x="4297680" y="2651760"/>
-            <a:ext cx="3611880" cy="64008"/>
+            <a:off x="548640" y="4617720"/>
+            <a:ext cx="64008" cy="1051560"/>
           </a:xfrm>
           <a:prstGeom prst="rect">
             <a:avLst/>
           </a:prstGeom>
           <a:solidFill>
-            <a:srgbClr val="000091"/>
+            <a:srgbClr val="18753C"/>
           </a:solidFill>
           <a:ln>
             <a:noFill/>
@@ -5391,14 +6121,14 @@
       </p:sp>
       <p:sp>
         <p:nvSpPr>
-          <p:cNvPr id="12" name="TextBox 11"/>
+          <p:cNvPr id="19" name="TextBox 18"/>
           <p:cNvSpPr txBox="1"/>
           <p:nvPr/>
         </p:nvSpPr>
         <p:spPr>
           <a:xfrm>
-            <a:off x="4480560" y="2816352"/>
-            <a:ext cx="3246120" cy="457200"/>
+            <a:off x="749808" y="4709159"/>
+            <a:ext cx="10707624" cy="886968"/>
           </a:xfrm>
           <a:prstGeom prst="rect">
             <a:avLst/>
@@ -5406,46 +6136,7 @@
           <a:noFill/>
         </p:spPr>
         <p:txBody>
-          <a:bodyPr wrap="square" lIns="0" rIns="0" tIns="0" bIns="0">
-            <a:spAutoFit/>
-          </a:bodyPr>
-          <a:lstStyle/>
-          <a:p>
-            <a:pPr algn="l">
-              <a:spcAft>
-                <a:spcPts val="100"/>
-              </a:spcAft>
-            </a:pPr>
-            <a:r>
-              <a:rPr sz="1500" b="1">
-                <a:solidFill>
-                  <a:srgbClr val="000091"/>
-                </a:solidFill>
-                <a:latin typeface="Marianne"/>
-              </a:rPr>
-              <a:t>Voie Bedrock, cadrée avec AWS</a:t>
-            </a:r>
-          </a:p>
-        </p:txBody>
-      </p:sp>
-      <p:sp>
-        <p:nvSpPr>
-          <p:cNvPr id="13" name="TextBox 12"/>
-          <p:cNvSpPr txBox="1"/>
-          <p:nvPr/>
-        </p:nvSpPr>
-        <p:spPr>
-          <a:xfrm>
-            <a:off x="4480560" y="3319272"/>
-            <a:ext cx="3246120" cy="1572768"/>
-          </a:xfrm>
-          <a:prstGeom prst="rect">
-            <a:avLst/>
-          </a:prstGeom>
-          <a:noFill/>
-        </p:spPr>
-        <p:txBody>
-          <a:bodyPr wrap="square" lIns="0" rIns="0" tIns="0" bIns="0">
+          <a:bodyPr wrap="square">
             <a:spAutoFit/>
           </a:bodyPr>
           <a:lstStyle/>
@@ -5455,326 +6146,45 @@
                 <a:spcPct val="115000"/>
               </a:lnSpc>
               <a:spcAft>
-                <a:spcPts val="500"/>
+                <a:spcPts val="400"/>
               </a:spcAft>
             </a:pPr>
             <a:r>
-              <a:rPr sz="1300" b="0">
-                <a:solidFill>
-                  <a:srgbClr val="2B2B2B"/>
-                </a:solidFill>
-                <a:latin typeface="Marianne"/>
-              </a:rPr>
-              <a:t>Large catalogue de modèles, dont l'open-weight, en conservant l'observabilité.</a:t>
-            </a:r>
-          </a:p>
-          <a:p>
-            <a:pPr algn="l">
-              <a:lnSpc>
-                <a:spcPct val="115000"/>
-              </a:lnSpc>
-              <a:spcAft>
-                <a:spcPts val="500"/>
-              </a:spcAft>
-            </a:pPr>
-            <a:r>
-              <a:rPr sz="1300" b="0">
-                <a:solidFill>
-                  <a:srgbClr val="2B2B2B"/>
-                </a:solidFill>
-                <a:latin typeface="Marianne"/>
-              </a:rPr>
-              <a:t>Coûts au token potentiellement inférieurs à ceux d'Anthropic.</a:t>
-            </a:r>
-          </a:p>
-        </p:txBody>
-      </p:sp>
-      <p:sp>
-        <p:nvSpPr>
-          <p:cNvPr id="14" name="Rectangle 13"/>
-          <p:cNvSpPr/>
-          <p:nvPr/>
-        </p:nvSpPr>
-        <p:spPr>
-          <a:xfrm>
-            <a:off x="8092440" y="2651760"/>
-            <a:ext cx="3611880" cy="2377440"/>
-          </a:xfrm>
-          <a:prstGeom prst="rect">
-            <a:avLst/>
-          </a:prstGeom>
-          <a:solidFill>
-            <a:srgbClr val="FFFFFF"/>
-          </a:solidFill>
-          <a:ln>
-            <a:noFill/>
-          </a:ln>
-          <a:effectLst/>
-        </p:spPr>
-        <p:style>
-          <a:lnRef idx="1">
-            <a:schemeClr val="accent1"/>
-          </a:lnRef>
-          <a:fillRef idx="3">
-            <a:schemeClr val="accent1"/>
-          </a:fillRef>
-          <a:effectRef idx="2">
-            <a:schemeClr val="accent1"/>
-          </a:effectRef>
-          <a:fontRef idx="minor">
-            <a:schemeClr val="lt1"/>
-          </a:fontRef>
-        </p:style>
-        <p:txBody>
-          <a:bodyPr rtlCol="0" anchor="ctr"/>
-          <a:lstStyle/>
-          <a:p>
-            <a:pPr algn="ctr"/>
-          </a:p>
-        </p:txBody>
-      </p:sp>
-      <p:sp>
-        <p:nvSpPr>
-          <p:cNvPr id="15" name="Rectangle 14"/>
-          <p:cNvSpPr/>
-          <p:nvPr/>
-        </p:nvSpPr>
-        <p:spPr>
-          <a:xfrm>
-            <a:off x="8092440" y="2651760"/>
-            <a:ext cx="3611880" cy="64008"/>
-          </a:xfrm>
-          <a:prstGeom prst="rect">
-            <a:avLst/>
-          </a:prstGeom>
-          <a:solidFill>
-            <a:srgbClr val="000091"/>
-          </a:solidFill>
-          <a:ln>
-            <a:noFill/>
-          </a:ln>
-          <a:effectLst/>
-        </p:spPr>
-        <p:style>
-          <a:lnRef idx="1">
-            <a:schemeClr val="accent1"/>
-          </a:lnRef>
-          <a:fillRef idx="3">
-            <a:schemeClr val="accent1"/>
-          </a:fillRef>
-          <a:effectRef idx="2">
-            <a:schemeClr val="accent1"/>
-          </a:effectRef>
-          <a:fontRef idx="minor">
-            <a:schemeClr val="lt1"/>
-          </a:fontRef>
-        </p:style>
-        <p:txBody>
-          <a:bodyPr rtlCol="0" anchor="ctr"/>
-          <a:lstStyle/>
-          <a:p>
-            <a:pPr algn="ctr"/>
-          </a:p>
-        </p:txBody>
-      </p:sp>
-      <p:sp>
-        <p:nvSpPr>
-          <p:cNvPr id="16" name="TextBox 15"/>
-          <p:cNvSpPr txBox="1"/>
-          <p:nvPr/>
-        </p:nvSpPr>
-        <p:spPr>
-          <a:xfrm>
-            <a:off x="8275319" y="2816352"/>
-            <a:ext cx="3246120" cy="457200"/>
-          </a:xfrm>
-          <a:prstGeom prst="rect">
-            <a:avLst/>
-          </a:prstGeom>
-          <a:noFill/>
-        </p:spPr>
-        <p:txBody>
-          <a:bodyPr wrap="square" lIns="0" rIns="0" tIns="0" bIns="0">
-            <a:spAutoFit/>
-          </a:bodyPr>
-          <a:lstStyle/>
-          <a:p>
-            <a:pPr algn="l">
-              <a:spcAft>
-                <a:spcPts val="100"/>
-              </a:spcAft>
-            </a:pPr>
-            <a:r>
-              <a:rPr sz="1500" b="1">
+              <a:rPr sz="1150" b="1">
                 <a:solidFill>
                   <a:srgbClr val="000091"/>
                 </a:solidFill>
                 <a:latin typeface="Marianne"/>
               </a:rPr>
-              <a:t>Bench souveraineté &amp; conformité</a:t>
-            </a:r>
-          </a:p>
-        </p:txBody>
-      </p:sp>
-      <p:sp>
-        <p:nvSpPr>
-          <p:cNvPr id="17" name="TextBox 16"/>
-          <p:cNvSpPr txBox="1"/>
-          <p:nvPr/>
-        </p:nvSpPr>
-        <p:spPr>
-          <a:xfrm>
-            <a:off x="8275319" y="3319272"/>
-            <a:ext cx="3246120" cy="1572768"/>
-          </a:xfrm>
-          <a:prstGeom prst="rect">
-            <a:avLst/>
-          </a:prstGeom>
-          <a:noFill/>
-        </p:spPr>
-        <p:txBody>
-          <a:bodyPr wrap="square" lIns="0" rIns="0" tIns="0" bIns="0">
-            <a:spAutoFit/>
-          </a:bodyPr>
-          <a:lstStyle/>
-          <a:p>
-            <a:pPr algn="l">
-              <a:lnSpc>
-                <a:spcPct val="115000"/>
-              </a:lnSpc>
-              <a:spcAft>
-                <a:spcPts val="500"/>
-              </a:spcAft>
-            </a:pPr>
-            <a:r>
-              <a:rPr sz="1300" b="0">
-                <a:solidFill>
-                  <a:srgbClr val="2B2B2B"/>
-                </a:solidFill>
-                <a:latin typeface="Marianne"/>
-              </a:rPr>
-              <a:t>Matrice performance / prix / souveraineté / conformité (7 stacks comparées).</a:t>
-            </a:r>
-          </a:p>
-          <a:p>
-            <a:pPr algn="l">
-              <a:lnSpc>
-                <a:spcPct val="115000"/>
-              </a:lnSpc>
-              <a:spcAft>
-                <a:spcPts val="500"/>
-              </a:spcAft>
-            </a:pPr>
-            <a:r>
-              <a:rPr sz="1300" b="0">
-                <a:solidFill>
-                  <a:srgbClr val="2B2B2B"/>
-                </a:solidFill>
-                <a:latin typeface="Marianne"/>
-              </a:rPr>
-              <a:t>Élargie aux modèles Bedrock pour décider de la direction.</a:t>
-            </a:r>
-          </a:p>
-        </p:txBody>
-      </p:sp>
-      <p:sp>
-        <p:nvSpPr>
-          <p:cNvPr id="18" name="Rectangle 17"/>
-          <p:cNvSpPr/>
-          <p:nvPr/>
-        </p:nvSpPr>
-        <p:spPr>
-          <a:xfrm>
-            <a:off x="502920" y="5394960"/>
-            <a:ext cx="11201400" cy="1051560"/>
-          </a:xfrm>
-          <a:prstGeom prst="rect">
-            <a:avLst/>
-          </a:prstGeom>
-          <a:solidFill>
-            <a:srgbClr val="DAF5E7"/>
-          </a:solidFill>
-          <a:ln>
-            <a:noFill/>
-          </a:ln>
-          <a:effectLst/>
-        </p:spPr>
-        <p:style>
-          <a:lnRef idx="1">
-            <a:schemeClr val="accent1"/>
-          </a:lnRef>
-          <a:fillRef idx="3">
-            <a:schemeClr val="accent1"/>
-          </a:fillRef>
-          <a:effectRef idx="2">
-            <a:schemeClr val="accent1"/>
-          </a:effectRef>
-          <a:fontRef idx="minor">
-            <a:schemeClr val="lt1"/>
-          </a:fontRef>
-        </p:style>
-        <p:txBody>
-          <a:bodyPr rtlCol="0" anchor="ctr" wrap="square" lIns="228600" rIns="182880" tIns="109728" bIns="91440"/>
-          <a:lstStyle/>
-          <a:p>
-            <a:pPr algn="ctr">
-              <a:lnSpc>
-                <a:spcPct val="115000"/>
-              </a:lnSpc>
-            </a:pPr>
-            <a:r>
-              <a:rPr sz="1500">
-                <a:solidFill>
-                  <a:srgbClr val="2B2B2B"/>
-                </a:solidFill>
-                <a:latin typeface="Marianne"/>
-              </a:rPr>
-              <a:t>La boucle se ferme. À chaque métier accompagné, la demande arrive ensuite d'elle-même (SIRENA, architectes, PO/RU). Accompagnement réel + freins levés = une dynamique d'équipe, et non plus une somme d'usages individuels.</a:t>
-            </a:r>
-          </a:p>
-        </p:txBody>
-      </p:sp>
-      <p:sp>
-        <p:nvSpPr>
-          <p:cNvPr id="19" name="Rectangle 18"/>
-          <p:cNvSpPr/>
-          <p:nvPr/>
-        </p:nvSpPr>
-        <p:spPr>
-          <a:xfrm>
-            <a:off x="502920" y="5394960"/>
-            <a:ext cx="54864" cy="1051560"/>
-          </a:xfrm>
-          <a:prstGeom prst="rect">
-            <a:avLst/>
-          </a:prstGeom>
-          <a:solidFill>
-            <a:srgbClr val="18753C"/>
-          </a:solidFill>
-          <a:ln>
-            <a:noFill/>
-          </a:ln>
-          <a:effectLst/>
-        </p:spPr>
-        <p:style>
-          <a:lnRef idx="1">
-            <a:schemeClr val="accent1"/>
-          </a:lnRef>
-          <a:fillRef idx="3">
-            <a:schemeClr val="accent1"/>
-          </a:fillRef>
-          <a:effectRef idx="2">
-            <a:schemeClr val="accent1"/>
-          </a:effectRef>
-          <a:fontRef idx="minor">
-            <a:schemeClr val="lt1"/>
-          </a:fontRef>
-        </p:style>
-        <p:txBody>
-          <a:bodyPr rtlCol="0" anchor="ctr"/>
-          <a:lstStyle/>
-          <a:p>
-            <a:pPr algn="ctr"/>
+              <a:t>La boucle se ferme.</a:t>
+            </a:r>
+            <a:r>
+              <a:rPr sz="1150" b="0">
+                <a:solidFill>
+                  <a:srgbClr val="1E1E1E"/>
+                </a:solidFill>
+                <a:latin typeface="Marianne"/>
+              </a:rPr>
+              <a:t> À chaque métier accompagné, la demande arrive ensuite d'elle-même (SIRENA, architectes, designers, PO/RU). Accompagnement réel + freins levés = l'adoption devient </a:t>
+            </a:r>
+            <a:r>
+              <a:rPr sz="1150" b="1">
+                <a:solidFill>
+                  <a:srgbClr val="000091"/>
+                </a:solidFill>
+                <a:latin typeface="Marianne"/>
+              </a:rPr>
+              <a:t>une dynamique d'équipe</a:t>
+            </a:r>
+            <a:r>
+              <a:rPr sz="1150" b="0">
+                <a:solidFill>
+                  <a:srgbClr val="1E1E1E"/>
+                </a:solidFill>
+                <a:latin typeface="Marianne"/>
+              </a:rPr>
+              <a:t>, et non plus une somme d'usages individuels.</a:t>
+            </a:r>
           </a:p>
         </p:txBody>
       </p:sp>

--- a/Livrables/Recit-Mission2/Impact_Adoption-IA_3-slides.pptx
+++ b/Livrables/Recit-Mission2/Impact_Adoption-IA_3-slides.pptx
@@ -3382,7 +3382,7 @@
         <p:spPr>
           <a:xfrm>
             <a:off x="548640" y="2514600"/>
-            <a:ext cx="3584448" cy="2103120"/>
+            <a:ext cx="3584448" cy="1783080"/>
           </a:xfrm>
           <a:prstGeom prst="rect">
             <a:avLst/>
@@ -3470,7 +3470,7 @@
         <p:spPr>
           <a:xfrm>
             <a:off x="658368" y="2862072"/>
-            <a:ext cx="3364991" cy="1682495"/>
+            <a:ext cx="3364991" cy="1362456"/>
           </a:xfrm>
           <a:prstGeom prst="rect">
             <a:avLst/>
@@ -3483,12 +3483,12 @@
           </a:bodyPr>
           <a:lstStyle/>
           <a:p>
-            <a:pPr algn="l">
+            <a:pPr>
               <a:lnSpc>
                 <a:spcPct val="115000"/>
               </a:lnSpc>
               <a:spcAft>
-                <a:spcPts val="400"/>
+                <a:spcPts val="600"/>
               </a:spcAft>
             </a:pPr>
             <a:r>
@@ -3501,36 +3501,13 @@
               <a:t>L'IA était pratiquée individuellement (développeurs de SIRENA, etc.), sans coordination ni mutualisation.</a:t>
             </a:r>
           </a:p>
-        </p:txBody>
-      </p:sp>
-      <p:sp>
-        <p:nvSpPr>
-          <p:cNvPr id="11" name="TextBox 10"/>
-          <p:cNvSpPr txBox="1"/>
-          <p:nvPr/>
-        </p:nvSpPr>
-        <p:spPr>
-          <a:xfrm>
-            <a:off x="658368" y="3319272"/>
-            <a:ext cx="3364991" cy="1225295"/>
-          </a:xfrm>
-          <a:prstGeom prst="rect">
-            <a:avLst/>
-          </a:prstGeom>
-          <a:noFill/>
-        </p:spPr>
-        <p:txBody>
-          <a:bodyPr wrap="square">
-            <a:spAutoFit/>
-          </a:bodyPr>
-          <a:lstStyle/>
-          <a:p>
-            <a:pPr algn="l">
+          <a:p>
+            <a:pPr>
               <a:lnSpc>
                 <a:spcPct val="115000"/>
               </a:lnSpc>
               <a:spcAft>
-                <a:spcPts val="400"/>
+                <a:spcPts val="600"/>
               </a:spcAft>
             </a:pPr>
             <a:r>
@@ -3547,14 +3524,14 @@
       </p:sp>
       <p:sp>
         <p:nvSpPr>
-          <p:cNvPr id="12" name="Rectangle 11"/>
+          <p:cNvPr id="11" name="Rectangle 10"/>
           <p:cNvSpPr/>
           <p:nvPr/>
         </p:nvSpPr>
         <p:spPr>
           <a:xfrm>
             <a:off x="4311396" y="2514600"/>
-            <a:ext cx="3584448" cy="2103120"/>
+            <a:ext cx="3584448" cy="1783080"/>
           </a:xfrm>
           <a:prstGeom prst="rect">
             <a:avLst/>
@@ -3593,7 +3570,7 @@
       </p:sp>
       <p:sp>
         <p:nvSpPr>
-          <p:cNvPr id="13" name="TextBox 12"/>
+          <p:cNvPr id="12" name="TextBox 11"/>
           <p:cNvSpPr txBox="1"/>
           <p:nvPr/>
         </p:nvSpPr>
@@ -3635,14 +3612,14 @@
       </p:sp>
       <p:sp>
         <p:nvSpPr>
-          <p:cNvPr id="14" name="TextBox 13"/>
+          <p:cNvPr id="13" name="TextBox 12"/>
           <p:cNvSpPr txBox="1"/>
           <p:nvPr/>
         </p:nvSpPr>
         <p:spPr>
           <a:xfrm>
             <a:off x="4421124" y="2862072"/>
-            <a:ext cx="3364991" cy="1682495"/>
+            <a:ext cx="3364991" cy="1362456"/>
           </a:xfrm>
           <a:prstGeom prst="rect">
             <a:avLst/>
@@ -3655,12 +3632,12 @@
           </a:bodyPr>
           <a:lstStyle/>
           <a:p>
-            <a:pPr algn="l">
+            <a:pPr>
               <a:lnSpc>
                 <a:spcPct val="115000"/>
               </a:lnSpc>
               <a:spcAft>
-                <a:spcPts val="400"/>
+                <a:spcPts val="600"/>
               </a:spcAft>
             </a:pPr>
             <a:r>
@@ -3673,36 +3650,13 @@
               <a:t>Sur un poste interne managé, impossible d'installer un harness soi-même.</a:t>
             </a:r>
           </a:p>
-        </p:txBody>
-      </p:sp>
-      <p:sp>
-        <p:nvSpPr>
-          <p:cNvPr id="15" name="TextBox 14"/>
-          <p:cNvSpPr txBox="1"/>
-          <p:nvPr/>
-        </p:nvSpPr>
-        <p:spPr>
-          <a:xfrm>
-            <a:off x="4421124" y="3319272"/>
-            <a:ext cx="3364991" cy="1225295"/>
-          </a:xfrm>
-          <a:prstGeom prst="rect">
-            <a:avLst/>
-          </a:prstGeom>
-          <a:noFill/>
-        </p:spPr>
-        <p:txBody>
-          <a:bodyPr wrap="square">
-            <a:spAutoFit/>
-          </a:bodyPr>
-          <a:lstStyle/>
-          <a:p>
-            <a:pPr algn="l">
+          <a:p>
+            <a:pPr>
               <a:lnSpc>
                 <a:spcPct val="115000"/>
               </a:lnSpc>
               <a:spcAft>
-                <a:spcPts val="400"/>
+                <a:spcPts val="600"/>
               </a:spcAft>
             </a:pPr>
             <a:r>
@@ -3719,14 +3673,14 @@
       </p:sp>
       <p:sp>
         <p:nvSpPr>
-          <p:cNvPr id="16" name="Rectangle 15"/>
+          <p:cNvPr id="14" name="Rectangle 13"/>
           <p:cNvSpPr/>
           <p:nvPr/>
         </p:nvSpPr>
         <p:spPr>
           <a:xfrm>
             <a:off x="8074152" y="2514600"/>
-            <a:ext cx="3584448" cy="2103120"/>
+            <a:ext cx="3584448" cy="1783080"/>
           </a:xfrm>
           <a:prstGeom prst="rect">
             <a:avLst/>
@@ -3765,7 +3719,7 @@
       </p:sp>
       <p:sp>
         <p:nvSpPr>
-          <p:cNvPr id="17" name="TextBox 16"/>
+          <p:cNvPr id="15" name="TextBox 14"/>
           <p:cNvSpPr txBox="1"/>
           <p:nvPr/>
         </p:nvSpPr>
@@ -3807,14 +3761,14 @@
       </p:sp>
       <p:sp>
         <p:nvSpPr>
-          <p:cNvPr id="18" name="TextBox 17"/>
+          <p:cNvPr id="16" name="TextBox 15"/>
           <p:cNvSpPr txBox="1"/>
           <p:nvPr/>
         </p:nvSpPr>
         <p:spPr>
           <a:xfrm>
             <a:off x="8183879" y="2862072"/>
-            <a:ext cx="3364991" cy="1682495"/>
+            <a:ext cx="3364991" cy="1362456"/>
           </a:xfrm>
           <a:prstGeom prst="rect">
             <a:avLst/>
@@ -3827,12 +3781,12 @@
           </a:bodyPr>
           <a:lstStyle/>
           <a:p>
-            <a:pPr algn="l">
+            <a:pPr>
               <a:lnSpc>
                 <a:spcPct val="115000"/>
               </a:lnSpc>
               <a:spcAft>
-                <a:spcPts val="400"/>
+                <a:spcPts val="600"/>
               </a:spcAft>
             </a:pPr>
             <a:r>
@@ -3845,36 +3799,13 @@
               <a:t>Les métiers ne connaissaient pas leurs propres cas d'usage potentiels.</a:t>
             </a:r>
           </a:p>
-        </p:txBody>
-      </p:sp>
-      <p:sp>
-        <p:nvSpPr>
-          <p:cNvPr id="19" name="TextBox 18"/>
-          <p:cNvSpPr txBox="1"/>
-          <p:nvPr/>
-        </p:nvSpPr>
-        <p:spPr>
-          <a:xfrm>
-            <a:off x="8183879" y="3319272"/>
-            <a:ext cx="3364991" cy="1225295"/>
-          </a:xfrm>
-          <a:prstGeom prst="rect">
-            <a:avLst/>
-          </a:prstGeom>
-          <a:noFill/>
-        </p:spPr>
-        <p:txBody>
-          <a:bodyPr wrap="square">
-            <a:spAutoFit/>
-          </a:bodyPr>
-          <a:lstStyle/>
-          <a:p>
-            <a:pPr algn="l">
+          <a:p>
+            <a:pPr>
               <a:lnSpc>
                 <a:spcPct val="115000"/>
               </a:lnSpc>
               <a:spcAft>
-                <a:spcPts val="400"/>
+                <a:spcPts val="600"/>
               </a:spcAft>
             </a:pPr>
             <a:r>
@@ -4194,12 +4125,12 @@
           </a:bodyPr>
           <a:lstStyle/>
           <a:p>
-            <a:pPr algn="l">
+            <a:pPr>
               <a:lnSpc>
                 <a:spcPct val="115000"/>
               </a:lnSpc>
               <a:spcAft>
-                <a:spcPts val="400"/>
+                <a:spcPts val="600"/>
               </a:spcAft>
             </a:pPr>
             <a:r>
@@ -4384,12 +4315,12 @@
           </a:bodyPr>
           <a:lstStyle/>
           <a:p>
-            <a:pPr algn="l">
+            <a:pPr>
               <a:lnSpc>
                 <a:spcPct val="115000"/>
               </a:lnSpc>
               <a:spcAft>
-                <a:spcPts val="400"/>
+                <a:spcPts val="600"/>
               </a:spcAft>
             </a:pPr>
             <a:r>
@@ -4574,12 +4505,12 @@
           </a:bodyPr>
           <a:lstStyle/>
           <a:p>
-            <a:pPr algn="l">
+            <a:pPr>
               <a:lnSpc>
                 <a:spcPct val="115000"/>
               </a:lnSpc>
               <a:spcAft>
-                <a:spcPts val="400"/>
+                <a:spcPts val="600"/>
               </a:spcAft>
             </a:pPr>
             <a:r>
@@ -4782,12 +4713,12 @@
           </a:bodyPr>
           <a:lstStyle/>
           <a:p>
-            <a:pPr algn="l">
+            <a:pPr>
               <a:lnSpc>
                 <a:spcPct val="115000"/>
               </a:lnSpc>
               <a:spcAft>
-                <a:spcPts val="400"/>
+                <a:spcPts val="600"/>
               </a:spcAft>
             </a:pPr>
             <a:r>
@@ -4990,12 +4921,12 @@
           </a:bodyPr>
           <a:lstStyle/>
           <a:p>
-            <a:pPr algn="l">
+            <a:pPr>
               <a:lnSpc>
                 <a:spcPct val="115000"/>
               </a:lnSpc>
               <a:spcAft>
-                <a:spcPts val="400"/>
+                <a:spcPts val="600"/>
               </a:spcAft>
             </a:pPr>
             <a:r>
@@ -5180,12 +5111,12 @@
           </a:bodyPr>
           <a:lstStyle/>
           <a:p>
-            <a:pPr algn="l">
+            <a:pPr>
               <a:lnSpc>
                 <a:spcPct val="115000"/>
               </a:lnSpc>
               <a:spcAft>
-                <a:spcPts val="400"/>
+                <a:spcPts val="600"/>
               </a:spcAft>
             </a:pPr>
             <a:r>
@@ -5416,7 +5347,7 @@
         <p:spPr>
           <a:xfrm>
             <a:off x="548640" y="1481328"/>
-            <a:ext cx="3584448" cy="2834640"/>
+            <a:ext cx="3584448" cy="2514600"/>
           </a:xfrm>
           <a:prstGeom prst="rect">
             <a:avLst/>
@@ -5504,7 +5435,7 @@
         <p:spPr>
           <a:xfrm>
             <a:off x="658368" y="1828800"/>
-            <a:ext cx="3364991" cy="2414016"/>
+            <a:ext cx="3364991" cy="2093976"/>
           </a:xfrm>
           <a:prstGeom prst="rect">
             <a:avLst/>
@@ -5517,12 +5448,12 @@
           </a:bodyPr>
           <a:lstStyle/>
           <a:p>
-            <a:pPr algn="l">
+            <a:pPr>
               <a:lnSpc>
                 <a:spcPct val="115000"/>
               </a:lnSpc>
               <a:spcAft>
-                <a:spcPts val="400"/>
+                <a:spcPts val="600"/>
               </a:spcAft>
             </a:pPr>
             <a:r>
@@ -5580,36 +5511,13 @@
               <a:t>.</a:t>
             </a:r>
           </a:p>
-        </p:txBody>
-      </p:sp>
-      <p:sp>
-        <p:nvSpPr>
-          <p:cNvPr id="8" name="TextBox 7"/>
-          <p:cNvSpPr txBox="1"/>
-          <p:nvPr/>
-        </p:nvSpPr>
-        <p:spPr>
-          <a:xfrm>
-            <a:off x="658368" y="2569464"/>
-            <a:ext cx="3364991" cy="1673352"/>
-          </a:xfrm>
-          <a:prstGeom prst="rect">
-            <a:avLst/>
-          </a:prstGeom>
-          <a:noFill/>
-        </p:spPr>
-        <p:txBody>
-          <a:bodyPr wrap="square">
-            <a:spAutoFit/>
-          </a:bodyPr>
-          <a:lstStyle/>
-          <a:p>
-            <a:pPr algn="l">
+          <a:p>
+            <a:pPr>
               <a:lnSpc>
                 <a:spcPct val="115000"/>
               </a:lnSpc>
               <a:spcAft>
-                <a:spcPts val="400"/>
+                <a:spcPts val="600"/>
               </a:spcAft>
             </a:pPr>
             <a:r>
@@ -5626,14 +5534,14 @@
       </p:sp>
       <p:sp>
         <p:nvSpPr>
-          <p:cNvPr id="9" name="Rectangle 8"/>
+          <p:cNvPr id="8" name="Rectangle 7"/>
           <p:cNvSpPr/>
           <p:nvPr/>
         </p:nvSpPr>
         <p:spPr>
           <a:xfrm>
             <a:off x="4311396" y="1481328"/>
-            <a:ext cx="3584448" cy="2834640"/>
+            <a:ext cx="3584448" cy="2514600"/>
           </a:xfrm>
           <a:prstGeom prst="rect">
             <a:avLst/>
@@ -5672,7 +5580,7 @@
       </p:sp>
       <p:sp>
         <p:nvSpPr>
-          <p:cNvPr id="10" name="TextBox 9"/>
+          <p:cNvPr id="9" name="TextBox 8"/>
           <p:cNvSpPr txBox="1"/>
           <p:nvPr/>
         </p:nvSpPr>
@@ -5714,14 +5622,14 @@
       </p:sp>
       <p:sp>
         <p:nvSpPr>
-          <p:cNvPr id="11" name="TextBox 10"/>
+          <p:cNvPr id="10" name="TextBox 9"/>
           <p:cNvSpPr txBox="1"/>
           <p:nvPr/>
         </p:nvSpPr>
         <p:spPr>
           <a:xfrm>
             <a:off x="4421124" y="1828800"/>
-            <a:ext cx="3364991" cy="2414016"/>
+            <a:ext cx="3364991" cy="2093976"/>
           </a:xfrm>
           <a:prstGeom prst="rect">
             <a:avLst/>
@@ -5734,12 +5642,12 @@
           </a:bodyPr>
           <a:lstStyle/>
           <a:p>
-            <a:pPr algn="l">
+            <a:pPr>
               <a:lnSpc>
                 <a:spcPct val="115000"/>
               </a:lnSpc>
               <a:spcAft>
-                <a:spcPts val="400"/>
+                <a:spcPts val="600"/>
               </a:spcAft>
             </a:pPr>
             <a:r>
@@ -5797,36 +5705,13 @@
               <a:t> à explorer.</a:t>
             </a:r>
           </a:p>
-        </p:txBody>
-      </p:sp>
-      <p:sp>
-        <p:nvSpPr>
-          <p:cNvPr id="12" name="TextBox 11"/>
-          <p:cNvSpPr txBox="1"/>
-          <p:nvPr/>
-        </p:nvSpPr>
-        <p:spPr>
-          <a:xfrm>
-            <a:off x="4421124" y="2569464"/>
-            <a:ext cx="3364991" cy="1673352"/>
-          </a:xfrm>
-          <a:prstGeom prst="rect">
-            <a:avLst/>
-          </a:prstGeom>
-          <a:noFill/>
-        </p:spPr>
-        <p:txBody>
-          <a:bodyPr wrap="square">
-            <a:spAutoFit/>
-          </a:bodyPr>
-          <a:lstStyle/>
-          <a:p>
-            <a:pPr algn="l">
+          <a:p>
+            <a:pPr>
               <a:lnSpc>
                 <a:spcPct val="115000"/>
               </a:lnSpc>
               <a:spcAft>
-                <a:spcPts val="400"/>
+                <a:spcPts val="600"/>
               </a:spcAft>
             </a:pPr>
             <a:r>
@@ -5843,14 +5728,14 @@
       </p:sp>
       <p:sp>
         <p:nvSpPr>
-          <p:cNvPr id="13" name="Rectangle 12"/>
+          <p:cNvPr id="11" name="Rectangle 10"/>
           <p:cNvSpPr/>
           <p:nvPr/>
         </p:nvSpPr>
         <p:spPr>
           <a:xfrm>
             <a:off x="8074152" y="1481328"/>
-            <a:ext cx="3584448" cy="2834640"/>
+            <a:ext cx="3584448" cy="2514600"/>
           </a:xfrm>
           <a:prstGeom prst="rect">
             <a:avLst/>
@@ -5889,7 +5774,7 @@
       </p:sp>
       <p:sp>
         <p:nvSpPr>
-          <p:cNvPr id="14" name="TextBox 13"/>
+          <p:cNvPr id="12" name="TextBox 11"/>
           <p:cNvSpPr txBox="1"/>
           <p:nvPr/>
         </p:nvSpPr>
@@ -5931,14 +5816,14 @@
       </p:sp>
       <p:sp>
         <p:nvSpPr>
-          <p:cNvPr id="15" name="TextBox 14"/>
+          <p:cNvPr id="13" name="TextBox 12"/>
           <p:cNvSpPr txBox="1"/>
           <p:nvPr/>
         </p:nvSpPr>
         <p:spPr>
           <a:xfrm>
             <a:off x="8183879" y="1828800"/>
-            <a:ext cx="3364991" cy="2414016"/>
+            <a:ext cx="3364991" cy="2093976"/>
           </a:xfrm>
           <a:prstGeom prst="rect">
             <a:avLst/>
@@ -5951,12 +5836,12 @@
           </a:bodyPr>
           <a:lstStyle/>
           <a:p>
-            <a:pPr algn="l">
+            <a:pPr>
               <a:lnSpc>
                 <a:spcPct val="115000"/>
               </a:lnSpc>
               <a:spcAft>
-                <a:spcPts val="400"/>
+                <a:spcPts val="600"/>
               </a:spcAft>
             </a:pPr>
             <a:r>
@@ -5987,36 +5872,13 @@
               <a:t> a été bâtie (7 stacks), élargie aux modèles Bedrock en août ; la stack interne (et externes sur sujets confidentiels) se tranchera ensuite.</a:t>
             </a:r>
           </a:p>
-        </p:txBody>
-      </p:sp>
-      <p:sp>
-        <p:nvSpPr>
-          <p:cNvPr id="16" name="TextBox 15"/>
-          <p:cNvSpPr txBox="1"/>
-          <p:nvPr/>
-        </p:nvSpPr>
-        <p:spPr>
-          <a:xfrm>
-            <a:off x="8183879" y="2569464"/>
-            <a:ext cx="3364991" cy="1673352"/>
-          </a:xfrm>
-          <a:prstGeom prst="rect">
-            <a:avLst/>
-          </a:prstGeom>
-          <a:noFill/>
-        </p:spPr>
-        <p:txBody>
-          <a:bodyPr wrap="square">
-            <a:spAutoFit/>
-          </a:bodyPr>
-          <a:lstStyle/>
-          <a:p>
-            <a:pPr algn="l">
+          <a:p>
+            <a:pPr>
               <a:lnSpc>
                 <a:spcPct val="115000"/>
               </a:lnSpc>
               <a:spcAft>
-                <a:spcPts val="400"/>
+                <a:spcPts val="600"/>
               </a:spcAft>
             </a:pPr>
             <a:r>
@@ -6033,13 +5895,13 @@
       </p:sp>
       <p:sp>
         <p:nvSpPr>
-          <p:cNvPr id="17" name="Rectangle 16"/>
+          <p:cNvPr id="14" name="Rectangle 13"/>
           <p:cNvSpPr/>
           <p:nvPr/>
         </p:nvSpPr>
         <p:spPr>
           <a:xfrm>
-            <a:off x="548640" y="4617720"/>
+            <a:off x="548640" y="4224528"/>
             <a:ext cx="11109960" cy="1051560"/>
           </a:xfrm>
           <a:prstGeom prst="rect">
@@ -6077,13 +5939,13 @@
       </p:sp>
       <p:sp>
         <p:nvSpPr>
-          <p:cNvPr id="18" name="Rectangle 17"/>
+          <p:cNvPr id="15" name="Rectangle 14"/>
           <p:cNvSpPr/>
           <p:nvPr/>
         </p:nvSpPr>
         <p:spPr>
           <a:xfrm>
-            <a:off x="548640" y="4617720"/>
+            <a:off x="548640" y="4224528"/>
             <a:ext cx="64008" cy="1051560"/>
           </a:xfrm>
           <a:prstGeom prst="rect">
@@ -6121,13 +5983,13 @@
       </p:sp>
       <p:sp>
         <p:nvSpPr>
-          <p:cNvPr id="19" name="TextBox 18"/>
+          <p:cNvPr id="16" name="TextBox 15"/>
           <p:cNvSpPr txBox="1"/>
           <p:nvPr/>
         </p:nvSpPr>
         <p:spPr>
           <a:xfrm>
-            <a:off x="749808" y="4709159"/>
+            <a:off x="749808" y="4315968"/>
             <a:ext cx="10707624" cy="886968"/>
           </a:xfrm>
           <a:prstGeom prst="rect">
